--- a/ips/영상처리시스템_CH01.pptx
+++ b/ips/영상처리시스템_CH01.pptx
@@ -5254,7 +5254,7 @@
             <a:avLst/>
           </a:prstGeom>
           <a:solidFill>
-            <a:srgbClr val="003956"/>
+            <a:srgbClr val="2F5DA8"/>
           </a:solidFill>
           <a:ln>
             <a:noFill/>
@@ -5311,7 +5311,7 @@
             <a:r>
               <a:rPr sz="2500" b="0">
                 <a:solidFill>
-                  <a:srgbClr val="003956"/>
+                  <a:srgbClr val="2F5DA8"/>
                 </a:solidFill>
                 <a:latin typeface="페이퍼로지 8 ExtraBold"/>
                 <a:ea typeface="페이퍼로지 8 ExtraBold"/>
@@ -5481,7 +5481,7 @@
             <a:avLst/>
           </a:prstGeom>
           <a:solidFill>
-            <a:srgbClr val="003956"/>
+            <a:srgbClr val="2F5DA8"/>
           </a:solidFill>
           <a:ln>
             <a:noFill/>
@@ -5538,7 +5538,7 @@
             <a:r>
               <a:rPr sz="2500" b="0">
                 <a:solidFill>
-                  <a:srgbClr val="003956"/>
+                  <a:srgbClr val="2F5DA8"/>
                 </a:solidFill>
                 <a:latin typeface="페이퍼로지 8 ExtraBold"/>
                 <a:ea typeface="페이퍼로지 8 ExtraBold"/>
@@ -5708,7 +5708,7 @@
             <a:avLst/>
           </a:prstGeom>
           <a:solidFill>
-            <a:srgbClr val="003956"/>
+            <a:srgbClr val="2F5DA8"/>
           </a:solidFill>
           <a:ln>
             <a:noFill/>
@@ -5765,7 +5765,7 @@
             <a:r>
               <a:rPr sz="2500" b="0">
                 <a:solidFill>
-                  <a:srgbClr val="003956"/>
+                  <a:srgbClr val="2F5DA8"/>
                 </a:solidFill>
                 <a:latin typeface="페이퍼로지 8 ExtraBold"/>
                 <a:ea typeface="페이퍼로지 8 ExtraBold"/>
@@ -5935,7 +5935,7 @@
             <a:avLst/>
           </a:prstGeom>
           <a:solidFill>
-            <a:srgbClr val="003956"/>
+            <a:srgbClr val="2F5DA8"/>
           </a:solidFill>
           <a:ln>
             <a:noFill/>
@@ -5992,7 +5992,7 @@
             <a:r>
               <a:rPr sz="2500" b="0">
                 <a:solidFill>
-                  <a:srgbClr val="003956"/>
+                  <a:srgbClr val="2F5DA8"/>
                 </a:solidFill>
                 <a:latin typeface="페이퍼로지 8 ExtraBold"/>
                 <a:ea typeface="페이퍼로지 8 ExtraBold"/>
@@ -6177,7 +6177,7 @@
             <a:r>
               <a:rPr sz="2300" b="0">
                 <a:solidFill>
-                  <a:srgbClr val="003956"/>
+                  <a:srgbClr val="2F5DA8"/>
                 </a:solidFill>
                 <a:latin typeface="프리젠테이션 5 Medium"/>
                 <a:ea typeface="프리젠테이션 5 Medium"/>
@@ -6213,7 +6213,7 @@
             <a:r>
               <a:rPr sz="2300" b="0">
                 <a:solidFill>
-                  <a:srgbClr val="003956"/>
+                  <a:srgbClr val="2F5DA8"/>
                 </a:solidFill>
                 <a:latin typeface="프리젠테이션 5 Medium"/>
                 <a:ea typeface="프리젠테이션 5 Medium"/>
@@ -6242,7 +6242,7 @@
             <a:r>
               <a:rPr sz="2300" b="0">
                 <a:solidFill>
-                  <a:srgbClr val="003956"/>
+                  <a:srgbClr val="2F5DA8"/>
                 </a:solidFill>
                 <a:latin typeface="프리젠테이션 5 Medium"/>
                 <a:ea typeface="프리젠테이션 5 Medium"/>
@@ -7437,7 +7437,7 @@
             <a:r>
               <a:rPr sz="2800" b="0">
                 <a:solidFill>
-                  <a:srgbClr val="003956"/>
+                  <a:srgbClr val="2F5DA8"/>
                 </a:solidFill>
                 <a:latin typeface="프리젠테이션 5 Medium"/>
                 <a:ea typeface="프리젠테이션 5 Medium"/>
@@ -7489,7 +7489,7 @@
             <a:r>
               <a:rPr sz="2800" b="0">
                 <a:solidFill>
-                  <a:srgbClr val="003956"/>
+                  <a:srgbClr val="2F5DA8"/>
                 </a:solidFill>
                 <a:latin typeface="프리젠테이션 5 Medium"/>
                 <a:ea typeface="프리젠테이션 5 Medium"/>
@@ -8296,7 +8296,7 @@
             <a:r>
               <a:rPr sz="2500" b="0">
                 <a:solidFill>
-                  <a:srgbClr val="003956"/>
+                  <a:srgbClr val="2F5DA8"/>
                 </a:solidFill>
                 <a:latin typeface="프리젠테이션 5 Medium"/>
                 <a:ea typeface="프리젠테이션 5 Medium"/>
@@ -8343,7 +8343,7 @@
             <a:r>
               <a:rPr sz="2500" b="0">
                 <a:solidFill>
-                  <a:srgbClr val="003956"/>
+                  <a:srgbClr val="2F5DA8"/>
                 </a:solidFill>
                 <a:latin typeface="프리젠테이션 5 Medium"/>
                 <a:ea typeface="프리젠테이션 5 Medium"/>
@@ -8397,7 +8397,7 @@
             <a:r>
               <a:rPr sz="2500" b="0">
                 <a:solidFill>
-                  <a:srgbClr val="003956"/>
+                  <a:srgbClr val="2F5DA8"/>
                 </a:solidFill>
                 <a:latin typeface="프리젠테이션 5 Medium"/>
                 <a:ea typeface="프리젠테이션 5 Medium"/>
@@ -8929,7 +8929,7 @@
             </a:avLst>
           </a:prstGeom>
           <a:solidFill>
-            <a:srgbClr val="003956"/>
+            <a:srgbClr val="2F5DA8"/>
           </a:solidFill>
           <a:ln>
             <a:noFill/>
@@ -9038,7 +9038,7 @@
             <a:r>
               <a:rPr sz="2900" b="0">
                 <a:solidFill>
-                  <a:srgbClr val="003956"/>
+                  <a:srgbClr val="2F5DA8"/>
                 </a:solidFill>
                 <a:latin typeface="프리젠테이션 5 Medium"/>
                 <a:ea typeface="프리젠테이션 5 Medium"/>
@@ -9077,7 +9077,7 @@
             </a:avLst>
           </a:prstGeom>
           <a:solidFill>
-            <a:srgbClr val="003956"/>
+            <a:srgbClr val="2F5DA8"/>
           </a:solidFill>
           <a:ln>
             <a:noFill/>
@@ -9186,7 +9186,7 @@
             <a:r>
               <a:rPr sz="2900" b="0">
                 <a:solidFill>
-                  <a:srgbClr val="003956"/>
+                  <a:srgbClr val="2F5DA8"/>
                 </a:solidFill>
                 <a:latin typeface="프리젠테이션 5 Medium"/>
                 <a:ea typeface="프리젠테이션 5 Medium"/>
@@ -9214,7 +9214,7 @@
             </a:avLst>
           </a:prstGeom>
           <a:solidFill>
-            <a:srgbClr val="003956"/>
+            <a:srgbClr val="2F5DA8"/>
           </a:solidFill>
           <a:ln>
             <a:noFill/>
@@ -9323,7 +9323,7 @@
             <a:r>
               <a:rPr sz="2900" b="0">
                 <a:solidFill>
-                  <a:srgbClr val="003956"/>
+                  <a:srgbClr val="2F5DA8"/>
                 </a:solidFill>
                 <a:latin typeface="프리젠테이션 5 Medium"/>
                 <a:ea typeface="프리젠테이션 5 Medium"/>
@@ -9351,7 +9351,7 @@
             </a:avLst>
           </a:prstGeom>
           <a:solidFill>
-            <a:srgbClr val="003956"/>
+            <a:srgbClr val="2F5DA8"/>
           </a:solidFill>
           <a:ln>
             <a:noFill/>
@@ -9460,7 +9460,7 @@
             <a:r>
               <a:rPr sz="2900" b="0">
                 <a:solidFill>
-                  <a:srgbClr val="003956"/>
+                  <a:srgbClr val="2F5DA8"/>
                 </a:solidFill>
                 <a:latin typeface="프리젠테이션 5 Medium"/>
                 <a:ea typeface="프리젠테이션 5 Medium"/>
@@ -9599,7 +9599,7 @@
             <a:r>
               <a:rPr sz="3000" b="0">
                 <a:solidFill>
-                  <a:srgbClr val="003956"/>
+                  <a:srgbClr val="2F5DA8"/>
                 </a:solidFill>
                 <a:latin typeface="프리젠테이션 5 Medium"/>
                 <a:ea typeface="프리젠테이션 5 Medium"/>
@@ -10240,7 +10240,7 @@
             <a:r>
               <a:rPr sz="2500" b="0">
                 <a:solidFill>
-                  <a:srgbClr val="003956"/>
+                  <a:srgbClr val="2F5DA8"/>
                 </a:solidFill>
                 <a:latin typeface="페이퍼로지 8 ExtraBold"/>
                 <a:ea typeface="페이퍼로지 8 ExtraBold"/>
@@ -10281,7 +10281,7 @@
             <a:r>
               <a:rPr sz="2500" b="0">
                 <a:solidFill>
-                  <a:srgbClr val="003956"/>
+                  <a:srgbClr val="2F5DA8"/>
                 </a:solidFill>
                 <a:latin typeface="페이퍼로지 8 ExtraBold"/>
                 <a:ea typeface="페이퍼로지 8 ExtraBold"/>
@@ -10752,7 +10752,7 @@
             <a:r>
               <a:rPr sz="2200" b="0">
                 <a:solidFill>
-                  <a:srgbClr val="003956"/>
+                  <a:srgbClr val="2F5DA8"/>
                 </a:solidFill>
                 <a:latin typeface="프리젠테이션 5 Medium"/>
                 <a:ea typeface="프리젠테이션 5 Medium"/>
@@ -12810,7 +12810,7 @@
             <a:r>
               <a:rPr sz="4500" b="0">
                 <a:solidFill>
-                  <a:srgbClr val="003956"/>
+                  <a:srgbClr val="2F5DA8"/>
                 </a:solidFill>
                 <a:latin typeface="페이퍼로지 8 ExtraBold"/>
                 <a:ea typeface="페이퍼로지 8 ExtraBold"/>
@@ -12936,7 +12936,7 @@
             <a:r>
               <a:rPr sz="4500" b="0">
                 <a:solidFill>
-                  <a:srgbClr val="003956"/>
+                  <a:srgbClr val="2F5DA8"/>
                 </a:solidFill>
                 <a:latin typeface="페이퍼로지 8 ExtraBold"/>
                 <a:ea typeface="페이퍼로지 8 ExtraBold"/>
@@ -13062,7 +13062,7 @@
             <a:r>
               <a:rPr sz="4500" b="0">
                 <a:solidFill>
-                  <a:srgbClr val="003956"/>
+                  <a:srgbClr val="2F5DA8"/>
                 </a:solidFill>
                 <a:latin typeface="페이퍼로지 8 ExtraBold"/>
                 <a:ea typeface="페이퍼로지 8 ExtraBold"/>
@@ -13188,7 +13188,7 @@
             <a:r>
               <a:rPr sz="4500" b="0">
                 <a:solidFill>
-                  <a:srgbClr val="003956"/>
+                  <a:srgbClr val="2F5DA8"/>
                 </a:solidFill>
                 <a:latin typeface="페이퍼로지 8 ExtraBold"/>
                 <a:ea typeface="페이퍼로지 8 ExtraBold"/>
@@ -13619,7 +13619,7 @@
             </a:avLst>
           </a:prstGeom>
           <a:solidFill>
-            <a:srgbClr val="003956"/>
+            <a:srgbClr val="2F5DA8"/>
           </a:solidFill>
           <a:ln>
             <a:noFill/>
@@ -13728,7 +13728,7 @@
             <a:r>
               <a:rPr sz="2200" b="0">
                 <a:solidFill>
-                  <a:srgbClr val="003956"/>
+                  <a:srgbClr val="2F5DA8"/>
                 </a:solidFill>
                 <a:latin typeface="프리젠테이션 5 Medium"/>
                 <a:ea typeface="프리젠테이션 5 Medium"/>
@@ -13767,7 +13767,7 @@
             </a:avLst>
           </a:prstGeom>
           <a:solidFill>
-            <a:srgbClr val="003956"/>
+            <a:srgbClr val="2F5DA8"/>
           </a:solidFill>
           <a:ln>
             <a:noFill/>
@@ -13871,12 +13871,12 @@
                 <a:ea typeface="프리젠테이션 5 Medium"/>
                 <a:cs typeface="프리젠테이션 5 Medium"/>
               </a:rPr>
-              <a:t>교수님 강의 자료와 교재의 일부를 </a:t>
+              <a:t>교재의 그림·내용 일부를 </a:t>
             </a:r>
             <a:r>
               <a:rPr sz="2100" b="0">
                 <a:solidFill>
-                  <a:srgbClr val="003956"/>
+                  <a:srgbClr val="2F5DA8"/>
                 </a:solidFill>
                 <a:latin typeface="프리젠테이션 5 Medium"/>
                 <a:ea typeface="프리젠테이션 5 Medium"/>
@@ -13893,7 +13893,7 @@
                 <a:ea typeface="프리젠테이션 5 Medium"/>
                 <a:cs typeface="프리젠테이션 5 Medium"/>
               </a:rPr>
-              <a:t>에 따라 교육·연구 목적으로 발췌·인용하고, 각 슬라이드에 출처(교재 절·쪽)를 명시했다</a:t>
+              <a:t>에 따라 교육·연구 목적으로 발췌·인용하고, 각 슬라이드에 출처(교재 절·그림 번호)를 명시했다</a:t>
             </a:r>
           </a:p>
         </p:txBody>
@@ -13915,7 +13915,7 @@
             </a:avLst>
           </a:prstGeom>
           <a:solidFill>
-            <a:srgbClr val="003956"/>
+            <a:srgbClr val="2F5DA8"/>
           </a:solidFill>
           <a:ln>
             <a:noFill/>
@@ -14024,7 +14024,7 @@
             <a:r>
               <a:rPr sz="2900" b="0">
                 <a:solidFill>
-                  <a:srgbClr val="003956"/>
+                  <a:srgbClr val="2F5DA8"/>
                 </a:solidFill>
                 <a:latin typeface="프리젠테이션 5 Medium"/>
                 <a:ea typeface="프리젠테이션 5 Medium"/>
@@ -14174,7 +14174,7 @@
             <a:r>
               <a:rPr sz="1900" b="0">
                 <a:solidFill>
-                  <a:srgbClr val="003956"/>
+                  <a:srgbClr val="2F5DA8"/>
                 </a:solidFill>
                 <a:latin typeface="프리젠테이션 5 Medium"/>
                 <a:ea typeface="프리젠테이션 5 Medium"/>
@@ -14327,7 +14327,7 @@
               </a:lnSpc>
             </a:pPr>
             <a:r>
-              <a:rPr sz="2100" b="0">
+              <a:rPr sz="2300" b="0">
                 <a:solidFill>
                   <a:srgbClr val="1E2A30"/>
                 </a:solidFill>
@@ -14335,7 +14335,7 @@
                 <a:ea typeface="프리젠테이션 5 Medium"/>
                 <a:cs typeface="프리젠테이션 5 Medium"/>
               </a:rPr>
-              <a:t>정성환·배종욱, 『OpenCV-Python으로 배우는 영상 처리 및 응용』, 생능출판사  ·  담당 교수님 강의 자료(CH01~03)</a:t>
+              <a:t>정성환·배종욱, 『OpenCV-Python으로 배우는 영상 처리 및 응용』, 생능출판사  ·  수업 자료(CH01~03)</a:t>
             </a:r>
           </a:p>
         </p:txBody>
@@ -15074,7 +15074,7 @@
             </a:avLst>
           </a:prstGeom>
           <a:solidFill>
-            <a:srgbClr val="003956"/>
+            <a:srgbClr val="2F5DA8"/>
           </a:solidFill>
           <a:ln>
             <a:noFill/>
@@ -15183,7 +15183,7 @@
             <a:r>
               <a:rPr sz="2900" b="0">
                 <a:solidFill>
-                  <a:srgbClr val="003956"/>
+                  <a:srgbClr val="2F5DA8"/>
                 </a:solidFill>
                 <a:latin typeface="프리젠테이션 5 Medium"/>
                 <a:ea typeface="프리젠테이션 5 Medium"/>
@@ -15222,7 +15222,7 @@
             </a:avLst>
           </a:prstGeom>
           <a:solidFill>
-            <a:srgbClr val="003956"/>
+            <a:srgbClr val="2F5DA8"/>
           </a:solidFill>
           <a:ln>
             <a:noFill/>
@@ -15331,7 +15331,7 @@
             <a:r>
               <a:rPr sz="2900" b="0">
                 <a:solidFill>
-                  <a:srgbClr val="003956"/>
+                  <a:srgbClr val="2F5DA8"/>
                 </a:solidFill>
                 <a:latin typeface="프리젠테이션 5 Medium"/>
                 <a:ea typeface="프리젠테이션 5 Medium"/>
@@ -15370,7 +15370,7 @@
             </a:avLst>
           </a:prstGeom>
           <a:solidFill>
-            <a:srgbClr val="003956"/>
+            <a:srgbClr val="2F5DA8"/>
           </a:solidFill>
           <a:ln>
             <a:noFill/>
@@ -15479,7 +15479,7 @@
             <a:r>
               <a:rPr sz="2900" b="0">
                 <a:solidFill>
-                  <a:srgbClr val="003956"/>
+                  <a:srgbClr val="2F5DA8"/>
                 </a:solidFill>
                 <a:latin typeface="프리젠테이션 5 Medium"/>
                 <a:ea typeface="프리젠테이션 5 Medium"/>
@@ -15627,7 +15627,7 @@
             <a:r>
               <a:rPr sz="2900" b="0">
                 <a:solidFill>
-                  <a:srgbClr val="003956"/>
+                  <a:srgbClr val="2F5DA8"/>
                 </a:solidFill>
                 <a:latin typeface="프리젠테이션 5 Medium"/>
                 <a:ea typeface="프리젠테이션 5 Medium"/>
@@ -16169,7 +16169,7 @@
             <a:r>
               <a:rPr sz="2500" b="0">
                 <a:solidFill>
-                  <a:srgbClr val="003956"/>
+                  <a:srgbClr val="2F5DA8"/>
                 </a:solidFill>
                 <a:latin typeface="페이퍼로지 8 ExtraBold"/>
                 <a:ea typeface="페이퍼로지 8 ExtraBold"/>
@@ -16210,7 +16210,7 @@
             <a:r>
               <a:rPr sz="2500" b="0">
                 <a:solidFill>
-                  <a:srgbClr val="003956"/>
+                  <a:srgbClr val="2F5DA8"/>
                 </a:solidFill>
                 <a:latin typeface="페이퍼로지 8 ExtraBold"/>
                 <a:ea typeface="페이퍼로지 8 ExtraBold"/>
@@ -16251,7 +16251,7 @@
             <a:r>
               <a:rPr sz="2500" b="0">
                 <a:solidFill>
-                  <a:srgbClr val="003956"/>
+                  <a:srgbClr val="2F5DA8"/>
                 </a:solidFill>
                 <a:latin typeface="페이퍼로지 8 ExtraBold"/>
                 <a:ea typeface="페이퍼로지 8 ExtraBold"/>
@@ -16863,7 +16863,7 @@
             <a:r>
               <a:rPr sz="2900" b="0">
                 <a:solidFill>
-                  <a:srgbClr val="003956"/>
+                  <a:srgbClr val="2F5DA8"/>
                 </a:solidFill>
                 <a:latin typeface="프리젠테이션 5 Medium"/>
                 <a:ea typeface="프리젠테이션 5 Medium"/>
@@ -16963,7 +16963,7 @@
                 <a:ea typeface="프리젠테이션 5 Medium"/>
                 <a:cs typeface="프리젠테이션 5 Medium"/>
               </a:rPr>
-              <a:t>·  교재 1.1절 · 교수자료 5쪽</a:t>
+              <a:t>·  교재 1.1절</a:t>
             </a:r>
           </a:p>
         </p:txBody>
@@ -17521,7 +17521,7 @@
                 <a:ea typeface="프리젠테이션 5 Medium"/>
                 <a:cs typeface="프리젠테이션 5 Medium"/>
               </a:rPr>
-              <a:t>그림 1.1.1 영상처리의 예 — 출처: 담당 교수님 강의자료(CH01) · 교재 1.1절</a:t>
+              <a:t>그림 1.1.1 영상처리의 예 — 교재 발췌</a:t>
             </a:r>
           </a:p>
         </p:txBody>
@@ -17659,7 +17659,7 @@
             <a:r>
               <a:rPr sz="2200" b="0">
                 <a:solidFill>
-                  <a:srgbClr val="003956"/>
+                  <a:srgbClr val="2F5DA8"/>
                 </a:solidFill>
                 <a:latin typeface="프리젠테이션 5 Medium"/>
                 <a:ea typeface="프리젠테이션 5 Medium"/>
@@ -17688,7 +17688,7 @@
             <a:r>
               <a:rPr sz="2200" b="0">
                 <a:solidFill>
-                  <a:srgbClr val="003956"/>
+                  <a:srgbClr val="2F5DA8"/>
                 </a:solidFill>
                 <a:latin typeface="프리젠테이션 5 Medium"/>
                 <a:ea typeface="프리젠테이션 5 Medium"/>
@@ -18584,7 +18584,7 @@
             <a:r>
               <a:rPr sz="2800" b="0">
                 <a:solidFill>
-                  <a:srgbClr val="003956"/>
+                  <a:srgbClr val="2F5DA8"/>
                 </a:solidFill>
                 <a:latin typeface="프리젠테이션 5 Medium"/>
                 <a:ea typeface="프리젠테이션 5 Medium"/>
@@ -18636,7 +18636,7 @@
             <a:r>
               <a:rPr sz="2800" b="0">
                 <a:solidFill>
-                  <a:srgbClr val="003956"/>
+                  <a:srgbClr val="2F5DA8"/>
                 </a:solidFill>
                 <a:latin typeface="프리젠테이션 5 Medium"/>
                 <a:ea typeface="프리젠테이션 5 Medium"/>
@@ -18926,7 +18926,7 @@
             <a:r>
               <a:rPr sz="2800" b="0">
                 <a:solidFill>
-                  <a:srgbClr val="003956"/>
+                  <a:srgbClr val="2F5DA8"/>
                 </a:solidFill>
                 <a:latin typeface="프리젠테이션 5 Medium"/>
                 <a:ea typeface="프리젠테이션 5 Medium"/>
@@ -19044,7 +19044,7 @@
                 <a:ea typeface="프리젠테이션 5 Medium"/>
                 <a:cs typeface="프리젠테이션 5 Medium"/>
               </a:rPr>
-              <a:t>·  교재 1.2절 · 교수자료 7쪽</a:t>
+              <a:t>·  교재 1.2절</a:t>
             </a:r>
           </a:p>
         </p:txBody>
@@ -19526,7 +19526,7 @@
             <a:r>
               <a:rPr sz="2500" b="0">
                 <a:solidFill>
-                  <a:srgbClr val="003956"/>
+                  <a:srgbClr val="2F5DA8"/>
                 </a:solidFill>
                 <a:latin typeface="페이퍼로지 8 ExtraBold"/>
                 <a:ea typeface="페이퍼로지 8 ExtraBold"/>
@@ -19567,7 +19567,7 @@
             <a:r>
               <a:rPr sz="2500" b="0">
                 <a:solidFill>
-                  <a:srgbClr val="003956"/>
+                  <a:srgbClr val="2F5DA8"/>
                 </a:solidFill>
                 <a:latin typeface="페이퍼로지 8 ExtraBold"/>
                 <a:ea typeface="페이퍼로지 8 ExtraBold"/>
@@ -20780,7 +20780,7 @@
             <a:r>
               <a:rPr sz="2500" b="0">
                 <a:solidFill>
-                  <a:srgbClr val="003956"/>
+                  <a:srgbClr val="2F5DA8"/>
                 </a:solidFill>
                 <a:latin typeface="페이퍼로지 8 ExtraBold"/>
                 <a:ea typeface="페이퍼로지 8 ExtraBold"/>
@@ -20821,7 +20821,7 @@
             <a:r>
               <a:rPr sz="2500" b="0">
                 <a:solidFill>
-                  <a:srgbClr val="003956"/>
+                  <a:srgbClr val="2F5DA8"/>
                 </a:solidFill>
                 <a:latin typeface="페이퍼로지 8 ExtraBold"/>
                 <a:ea typeface="페이퍼로지 8 ExtraBold"/>
@@ -20862,7 +20862,7 @@
             <a:r>
               <a:rPr sz="2500" b="0">
                 <a:solidFill>
-                  <a:srgbClr val="003956"/>
+                  <a:srgbClr val="2F5DA8"/>
                 </a:solidFill>
                 <a:latin typeface="페이퍼로지 8 ExtraBold"/>
                 <a:ea typeface="페이퍼로지 8 ExtraBold"/>
@@ -20903,7 +20903,7 @@
             <a:r>
               <a:rPr sz="2500" b="0">
                 <a:solidFill>
-                  <a:srgbClr val="003956"/>
+                  <a:srgbClr val="2F5DA8"/>
                 </a:solidFill>
                 <a:latin typeface="페이퍼로지 8 ExtraBold"/>
                 <a:ea typeface="페이퍼로지 8 ExtraBold"/>
@@ -21620,7 +21620,7 @@
             <a:r>
               <a:rPr sz="2400" b="0">
                 <a:solidFill>
-                  <a:srgbClr val="003956"/>
+                  <a:srgbClr val="2F5DA8"/>
                 </a:solidFill>
                 <a:latin typeface="프리젠테이션 5 Medium"/>
                 <a:ea typeface="프리젠테이션 5 Medium"/>
@@ -21642,7 +21642,7 @@
             <a:r>
               <a:rPr sz="2400" b="0">
                 <a:solidFill>
-                  <a:srgbClr val="003956"/>
+                  <a:srgbClr val="2F5DA8"/>
                 </a:solidFill>
                 <a:latin typeface="프리젠테이션 5 Medium"/>
                 <a:ea typeface="프리젠테이션 5 Medium"/>
@@ -21664,7 +21664,7 @@
             <a:r>
               <a:rPr sz="2400" b="0">
                 <a:solidFill>
-                  <a:srgbClr val="003956"/>
+                  <a:srgbClr val="2F5DA8"/>
                 </a:solidFill>
                 <a:latin typeface="프리젠테이션 5 Medium"/>
                 <a:ea typeface="프리젠테이션 5 Medium"/>

--- a/ips/영상처리시스템_CH01.pptx
+++ b/ips/영상처리시스템_CH01.pptx
@@ -4686,7 +4686,7 @@
                 <a:ea typeface="페이퍼로지 6 SemiBold"/>
                 <a:cs typeface="페이퍼로지 6 SemiBold"/>
               </a:rPr>
-              <a:t>CHAPTER 01  ·  영상처리 개요</a:t>
+              <a:t>CHAPTER 01  ·  영상은 숫자다</a:t>
             </a:r>
           </a:p>
         </p:txBody>
@@ -5066,7 +5066,7 @@
                 <a:ea typeface="페이퍼로지 8 ExtraBold"/>
                 <a:cs typeface="페이퍼로지 8 ExtraBold"/>
               </a:rPr>
-              <a:t>1.5  영상은 이렇게 만들어진다</a:t>
+              <a:t>빛이 숫자가 되기까지</a:t>
             </a:r>
           </a:p>
         </p:txBody>
@@ -5149,7 +5149,7 @@
                 <a:ea typeface="페이퍼로지 6 SemiBold"/>
                 <a:cs typeface="페이퍼로지 6 SemiBold"/>
               </a:rPr>
-              <a:t>CH 01 · 영상처리 개요</a:t>
+              <a:t>CH 01 · 영상은 숫자다</a:t>
             </a:r>
           </a:p>
         </p:txBody>
@@ -6869,7 +6869,7 @@
                 <a:ea typeface="페이퍼로지 8 ExtraBold"/>
                 <a:cs typeface="페이퍼로지 8 ExtraBold"/>
               </a:rPr>
-              <a:t>아날로그를 디지털로 — 표본화와 양자화</a:t>
+              <a:t>표본화와 양자화 — 칸을 나누고 반올림한다</a:t>
             </a:r>
           </a:p>
         </p:txBody>
@@ -6952,7 +6952,7 @@
                 <a:ea typeface="페이퍼로지 6 SemiBold"/>
                 <a:cs typeface="페이퍼로지 6 SemiBold"/>
               </a:rPr>
-              <a:t>CH 01 · 영상처리 개요</a:t>
+              <a:t>CH 01 · 영상은 숫자다</a:t>
             </a:r>
           </a:p>
         </p:txBody>
@@ -7886,7 +7886,7 @@
                 <a:ea typeface="페이퍼로지 8 ExtraBold"/>
                 <a:cs typeface="페이퍼로지 8 ExtraBold"/>
               </a:rPr>
-              <a:t>1.6  디지털 영상 = 숫자 행렬</a:t>
+              <a:t>행렬로 읽는 영상</a:t>
             </a:r>
           </a:p>
         </p:txBody>
@@ -7969,7 +7969,7 @@
                 <a:ea typeface="페이퍼로지 6 SemiBold"/>
                 <a:cs typeface="페이퍼로지 6 SemiBold"/>
               </a:rPr>
-              <a:t>CH 01 · 영상처리 개요</a:t>
+              <a:t>CH 01 · 영상은 숫자다</a:t>
             </a:r>
           </a:p>
         </p:txBody>
@@ -8783,7 +8783,7 @@
                 <a:ea typeface="페이퍼로지 8 ExtraBold"/>
                 <a:cs typeface="페이퍼로지 8 ExtraBold"/>
               </a:rPr>
-              <a:t>저장 공간, 직접 계산해 보기</a:t>
+              <a:t>숫자판의 크기 계산</a:t>
             </a:r>
           </a:p>
         </p:txBody>
@@ -8866,7 +8866,7 @@
                 <a:ea typeface="페이퍼로지 6 SemiBold"/>
                 <a:cs typeface="페이퍼로지 6 SemiBold"/>
               </a:rPr>
-              <a:t>CH 01 · 영상처리 개요</a:t>
+              <a:t>CH 01 · 영상은 숫자다</a:t>
             </a:r>
           </a:p>
         </p:txBody>
@@ -9996,7 +9996,7 @@
                 <a:ea typeface="페이퍼로지 8 ExtraBold"/>
                 <a:cs typeface="페이퍼로지 8 ExtraBold"/>
               </a:rPr>
-              <a:t>영상처리의 일반식</a:t>
+              <a:t>모든 처리는 한 문장 — g = T[f]</a:t>
             </a:r>
           </a:p>
         </p:txBody>
@@ -10079,7 +10079,7 @@
                 <a:ea typeface="페이퍼로지 6 SemiBold"/>
                 <a:cs typeface="페이퍼로지 6 SemiBold"/>
               </a:rPr>
-              <a:t>CH 01 · 영상처리 개요</a:t>
+              <a:t>CH 01 · 영상은 숫자다</a:t>
             </a:r>
           </a:p>
         </p:txBody>
@@ -11131,7 +11131,7 @@
                 <a:ea typeface="페이퍼로지 8 ExtraBold"/>
                 <a:cs typeface="페이퍼로지 8 ExtraBold"/>
               </a:rPr>
-              <a:t>1.7  어디에 쓰이나</a:t>
+              <a:t>산업 속 영상처리</a:t>
             </a:r>
           </a:p>
         </p:txBody>
@@ -11214,7 +11214,7 @@
                 <a:ea typeface="페이퍼로지 6 SemiBold"/>
                 <a:cs typeface="페이퍼로지 6 SemiBold"/>
               </a:rPr>
-              <a:t>CH 01 · 영상처리 개요</a:t>
+              <a:t>CH 01 · 영상은 숫자다</a:t>
             </a:r>
           </a:p>
         </p:txBody>
@@ -12690,7 +12690,7 @@
                 <a:ea typeface="페이퍼로지 6 SemiBold"/>
                 <a:cs typeface="페이퍼로지 6 SemiBold"/>
               </a:rPr>
-              <a:t>CH 01 · 영상처리 개요</a:t>
+              <a:t>CH 01 · 영상은 숫자다</a:t>
             </a:r>
           </a:p>
         </p:txBody>
@@ -14485,7 +14485,7 @@
                 <a:ea typeface="페이퍼로지 8 ExtraBold"/>
                 <a:cs typeface="페이퍼로지 8 ExtraBold"/>
               </a:rPr>
-              <a:t>영상처리 개요</a:t>
+              <a:t>영상은 숫자다</a:t>
             </a:r>
           </a:p>
         </p:txBody>
@@ -14526,7 +14526,7 @@
                 <a:ea typeface="페이퍼로지 6 SemiBold"/>
                 <a:cs typeface="페이퍼로지 6 SemiBold"/>
               </a:rPr>
-              <a:t>Introduction to Image Processing</a:t>
+              <a:t>Digital Images, Explained</a:t>
             </a:r>
           </a:p>
         </p:txBody>
@@ -14567,7 +14567,7 @@
                 <a:ea typeface="프리젠테이션 5 Medium"/>
                 <a:cs typeface="프리젠테이션 5 Medium"/>
               </a:rPr>
-              <a:t>·  1.1 영상처리란?   ·   1.2 영상처리의 수준   ·   1.3 영상처리의 역사</a:t>
+              <a:t>·  화소, 영상의 최소 단위   ·   결과물로 나누는 두 수준   ·   달 사진에서 스마트폰까지</a:t>
             </a:r>
           </a:p>
         </p:txBody>
@@ -14608,7 +14608,7 @@
                 <a:ea typeface="프리젠테이션 5 Medium"/>
                 <a:cs typeface="프리젠테이션 5 Medium"/>
               </a:rPr>
-              <a:t>·  1.4 관련 분야   ·   1.5 영상의 형성 과정</a:t>
+              <a:t>·  비전·그래픽스와 경계 긋기   ·   빛이 숫자가 되기까지</a:t>
             </a:r>
           </a:p>
         </p:txBody>
@@ -14649,7 +14649,7 @@
                 <a:ea typeface="프리젠테이션 5 Medium"/>
                 <a:cs typeface="프리젠테이션 5 Medium"/>
               </a:rPr>
-              <a:t>·  1.6 디지털 영상의 표현   ·   1.7 응용 분야</a:t>
+              <a:t>·  행렬로 읽는 영상   ·   산업 속 영상처리</a:t>
             </a:r>
           </a:p>
         </p:txBody>
@@ -15011,7 +15011,7 @@
                 <a:ea typeface="페이퍼로지 6 SemiBold"/>
                 <a:cs typeface="페이퍼로지 6 SemiBold"/>
               </a:rPr>
-              <a:t>CH 01 · 영상처리 개요</a:t>
+              <a:t>CH 01 · 영상은 숫자다</a:t>
             </a:r>
           </a:p>
         </p:txBody>
@@ -15966,7 +15966,7 @@
                 <a:ea typeface="페이퍼로지 8 ExtraBold"/>
                 <a:cs typeface="페이퍼로지 8 ExtraBold"/>
               </a:rPr>
-              <a:t>1.1  영상처리란?</a:t>
+              <a:t>화소 — 영상의 최소 단위</a:t>
             </a:r>
           </a:p>
         </p:txBody>
@@ -16049,7 +16049,7 @@
                 <a:ea typeface="페이퍼로지 6 SemiBold"/>
                 <a:cs typeface="페이퍼로지 6 SemiBold"/>
               </a:rPr>
-              <a:t>CH 01 · 영상처리 개요</a:t>
+              <a:t>CH 01 · 영상은 숫자다</a:t>
             </a:r>
           </a:p>
         </p:txBody>
@@ -17325,7 +17325,7 @@
                 <a:ea typeface="페이퍼로지 6 SemiBold"/>
                 <a:cs typeface="페이퍼로지 6 SemiBold"/>
               </a:rPr>
-              <a:t>CH 01 · 영상처리 개요</a:t>
+              <a:t>CH 01 · 영상은 숫자다</a:t>
             </a:r>
           </a:p>
         </p:txBody>
@@ -18160,7 +18160,7 @@
                 <a:ea typeface="페이퍼로지 8 ExtraBold"/>
                 <a:cs typeface="페이퍼로지 8 ExtraBold"/>
               </a:rPr>
-              <a:t>1.2  영상처리의 두 수준</a:t>
+              <a:t>결과물로 나누는 두 수준</a:t>
             </a:r>
           </a:p>
         </p:txBody>
@@ -18243,7 +18243,7 @@
                 <a:ea typeface="페이퍼로지 6 SemiBold"/>
                 <a:cs typeface="페이퍼로지 6 SemiBold"/>
               </a:rPr>
-              <a:t>CH 01 · 영상처리 개요</a:t>
+              <a:t>CH 01 · 영상은 숫자다</a:t>
             </a:r>
           </a:p>
         </p:txBody>
@@ -19323,7 +19323,7 @@
                 <a:ea typeface="페이퍼로지 8 ExtraBold"/>
                 <a:cs typeface="페이퍼로지 8 ExtraBold"/>
               </a:rPr>
-              <a:t>1.3  영상처리의 역사</a:t>
+              <a:t>달 사진에서 스마트폰까지</a:t>
             </a:r>
           </a:p>
         </p:txBody>
@@ -19406,7 +19406,7 @@
                 <a:ea typeface="페이퍼로지 6 SemiBold"/>
                 <a:cs typeface="페이퍼로지 6 SemiBold"/>
               </a:rPr>
-              <a:t>CH 01 · 영상처리 개요</a:t>
+              <a:t>CH 01 · 영상은 숫자다</a:t>
             </a:r>
           </a:p>
         </p:txBody>
@@ -20577,7 +20577,7 @@
                 <a:ea typeface="페이퍼로지 8 ExtraBold"/>
                 <a:cs typeface="페이퍼로지 8 ExtraBold"/>
               </a:rPr>
-              <a:t>1.4  세 분야는 입출력으로 구분한다</a:t>
+              <a:t>비전·그래픽스와 경계 긋기</a:t>
             </a:r>
           </a:p>
         </p:txBody>
@@ -20660,7 +20660,7 @@
                 <a:ea typeface="페이퍼로지 6 SemiBold"/>
                 <a:cs typeface="페이퍼로지 6 SemiBold"/>
               </a:rPr>
-              <a:t>CH 01 · 영상처리 개요</a:t>
+              <a:t>CH 01 · 영상은 숫자다</a:t>
             </a:r>
           </a:p>
         </p:txBody>

--- a/ips/영상처리시스템_CH01.pptx
+++ b/ips/영상처리시스템_CH01.pptx
@@ -4686,7 +4686,7 @@
                 <a:ea typeface="페이퍼로지 6 SemiBold"/>
                 <a:cs typeface="페이퍼로지 6 SemiBold"/>
               </a:rPr>
-              <a:t>CHAPTER 01  ·  영상은 숫자다</a:t>
+              <a:t>CHAPTER 01  ·  디지털 영상의 원리</a:t>
             </a:r>
           </a:p>
         </p:txBody>
@@ -5149,7 +5149,7 @@
                 <a:ea typeface="페이퍼로지 6 SemiBold"/>
                 <a:cs typeface="페이퍼로지 6 SemiBold"/>
               </a:rPr>
-              <a:t>CH 01 · 영상은 숫자다</a:t>
+              <a:t>CH 01 · 디지털 영상의 원리</a:t>
             </a:r>
           </a:p>
         </p:txBody>
@@ -6952,7 +6952,7 @@
                 <a:ea typeface="페이퍼로지 6 SemiBold"/>
                 <a:cs typeface="페이퍼로지 6 SemiBold"/>
               </a:rPr>
-              <a:t>CH 01 · 영상은 숫자다</a:t>
+              <a:t>CH 01 · 디지털 영상의 원리</a:t>
             </a:r>
           </a:p>
         </p:txBody>
@@ -7969,7 +7969,7 @@
                 <a:ea typeface="페이퍼로지 6 SemiBold"/>
                 <a:cs typeface="페이퍼로지 6 SemiBold"/>
               </a:rPr>
-              <a:t>CH 01 · 영상은 숫자다</a:t>
+              <a:t>CH 01 · 디지털 영상의 원리</a:t>
             </a:r>
           </a:p>
         </p:txBody>
@@ -8866,7 +8866,7 @@
                 <a:ea typeface="페이퍼로지 6 SemiBold"/>
                 <a:cs typeface="페이퍼로지 6 SemiBold"/>
               </a:rPr>
-              <a:t>CH 01 · 영상은 숫자다</a:t>
+              <a:t>CH 01 · 디지털 영상의 원리</a:t>
             </a:r>
           </a:p>
         </p:txBody>
@@ -10079,7 +10079,7 @@
                 <a:ea typeface="페이퍼로지 6 SemiBold"/>
                 <a:cs typeface="페이퍼로지 6 SemiBold"/>
               </a:rPr>
-              <a:t>CH 01 · 영상은 숫자다</a:t>
+              <a:t>CH 01 · 디지털 영상의 원리</a:t>
             </a:r>
           </a:p>
         </p:txBody>
@@ -11214,7 +11214,7 @@
                 <a:ea typeface="페이퍼로지 6 SemiBold"/>
                 <a:cs typeface="페이퍼로지 6 SemiBold"/>
               </a:rPr>
-              <a:t>CH 01 · 영상은 숫자다</a:t>
+              <a:t>CH 01 · 디지털 영상의 원리</a:t>
             </a:r>
           </a:p>
         </p:txBody>
@@ -12690,7 +12690,7 @@
                 <a:ea typeface="페이퍼로지 6 SemiBold"/>
                 <a:cs typeface="페이퍼로지 6 SemiBold"/>
               </a:rPr>
-              <a:t>CH 01 · 영상은 숫자다</a:t>
+              <a:t>CH 01 · 디지털 영상의 원리</a:t>
             </a:r>
           </a:p>
         </p:txBody>
@@ -14485,7 +14485,7 @@
                 <a:ea typeface="페이퍼로지 8 ExtraBold"/>
                 <a:cs typeface="페이퍼로지 8 ExtraBold"/>
               </a:rPr>
-              <a:t>영상은 숫자다</a:t>
+              <a:t>디지털 영상의 원리</a:t>
             </a:r>
           </a:p>
         </p:txBody>
@@ -14526,7 +14526,7 @@
                 <a:ea typeface="페이퍼로지 6 SemiBold"/>
                 <a:cs typeface="페이퍼로지 6 SemiBold"/>
               </a:rPr>
-              <a:t>Digital Images, Explained</a:t>
+              <a:t>Pixels, Sampling and Quantization</a:t>
             </a:r>
           </a:p>
         </p:txBody>
@@ -15011,7 +15011,7 @@
                 <a:ea typeface="페이퍼로지 6 SemiBold"/>
                 <a:cs typeface="페이퍼로지 6 SemiBold"/>
               </a:rPr>
-              <a:t>CH 01 · 영상은 숫자다</a:t>
+              <a:t>CH 01 · 디지털 영상의 원리</a:t>
             </a:r>
           </a:p>
         </p:txBody>
@@ -16049,7 +16049,7 @@
                 <a:ea typeface="페이퍼로지 6 SemiBold"/>
                 <a:cs typeface="페이퍼로지 6 SemiBold"/>
               </a:rPr>
-              <a:t>CH 01 · 영상은 숫자다</a:t>
+              <a:t>CH 01 · 디지털 영상의 원리</a:t>
             </a:r>
           </a:p>
         </p:txBody>
@@ -17325,7 +17325,7 @@
                 <a:ea typeface="페이퍼로지 6 SemiBold"/>
                 <a:cs typeface="페이퍼로지 6 SemiBold"/>
               </a:rPr>
-              <a:t>CH 01 · 영상은 숫자다</a:t>
+              <a:t>CH 01 · 디지털 영상의 원리</a:t>
             </a:r>
           </a:p>
         </p:txBody>
@@ -18243,7 +18243,7 @@
                 <a:ea typeface="페이퍼로지 6 SemiBold"/>
                 <a:cs typeface="페이퍼로지 6 SemiBold"/>
               </a:rPr>
-              <a:t>CH 01 · 영상은 숫자다</a:t>
+              <a:t>CH 01 · 디지털 영상의 원리</a:t>
             </a:r>
           </a:p>
         </p:txBody>
@@ -19406,7 +19406,7 @@
                 <a:ea typeface="페이퍼로지 6 SemiBold"/>
                 <a:cs typeface="페이퍼로지 6 SemiBold"/>
               </a:rPr>
-              <a:t>CH 01 · 영상은 숫자다</a:t>
+              <a:t>CH 01 · 디지털 영상의 원리</a:t>
             </a:r>
           </a:p>
         </p:txBody>
@@ -20660,7 +20660,7 @@
                 <a:ea typeface="페이퍼로지 6 SemiBold"/>
                 <a:cs typeface="페이퍼로지 6 SemiBold"/>
               </a:rPr>
-              <a:t>CH 01 · 영상은 숫자다</a:t>
+              <a:t>CH 01 · 디지털 영상의 원리</a:t>
             </a:r>
           </a:p>
         </p:txBody>

--- a/ips/영상처리시스템_CH01.pptx
+++ b/ips/영상처리시스템_CH01.pptx
@@ -4511,7 +4511,7 @@
               </a:lnSpc>
             </a:pPr>
             <a:r>
-              <a:rPr sz="2400" b="0">
+              <a:rPr sz="2400" b="0" lang="ko-KR" altLang="en-US">
                 <a:solidFill>
                   <a:srgbClr val="96A8A7"/>
                 </a:solidFill>
@@ -4552,7 +4552,7 @@
               </a:lnSpc>
             </a:pPr>
             <a:r>
-              <a:rPr sz="8500" b="0">
+              <a:rPr sz="8500" b="0" lang="ko-KR" altLang="en-US">
                 <a:solidFill>
                   <a:srgbClr val="FFFFFF"/>
                 </a:solidFill>
@@ -4637,7 +4637,7 @@
               </a:lnSpc>
             </a:pPr>
             <a:r>
-              <a:rPr sz="2600" b="0">
+              <a:rPr sz="2600" b="0" lang="ko-KR" altLang="en-US">
                 <a:solidFill>
                   <a:srgbClr val="FFFFFF"/>
                 </a:solidFill>
@@ -4678,7 +4678,7 @@
               </a:lnSpc>
             </a:pPr>
             <a:r>
-              <a:rPr sz="2900" b="0">
+              <a:rPr sz="2900" b="0" lang="ko-KR" altLang="en-US">
                 <a:solidFill>
                   <a:srgbClr val="C9D4E2"/>
                 </a:solidFill>
@@ -4761,7 +4761,7 @@
               </a:lnSpc>
             </a:pPr>
             <a:r>
-              <a:rPr sz="2500" b="0">
+              <a:rPr sz="2500" b="0" lang="ko-KR" altLang="en-US">
                 <a:solidFill>
                   <a:srgbClr val="96A8A7"/>
                 </a:solidFill>
@@ -4779,7 +4779,7 @@
               </a:lnSpc>
             </a:pPr>
             <a:r>
-              <a:rPr sz="2500" b="0">
+              <a:rPr sz="2500" b="0" lang="ko-KR" altLang="en-US">
                 <a:solidFill>
                   <a:srgbClr val="96A8A7"/>
                 </a:solidFill>
@@ -4914,7 +4914,7 @@
               </a:lnSpc>
             </a:pPr>
             <a:r>
-              <a:rPr sz="1250" b="0">
+              <a:rPr sz="1250" b="0" lang="ko-KR" altLang="en-US">
                 <a:solidFill>
                   <a:srgbClr val="003956"/>
                 </a:solidFill>
@@ -4932,7 +4932,7 @@
               </a:lnSpc>
             </a:pPr>
             <a:r>
-              <a:rPr sz="1250" b="0">
+              <a:rPr sz="1250" b="0" lang="ko-KR" altLang="en-US">
                 <a:solidFill>
                   <a:srgbClr val="003956"/>
                 </a:solidFill>
@@ -4973,7 +4973,7 @@
               </a:lnSpc>
             </a:pPr>
             <a:r>
-              <a:rPr sz="1600" b="0">
+              <a:rPr sz="1600" b="0" lang="ko-KR" altLang="en-US">
                 <a:solidFill>
                   <a:srgbClr val="96A8A7"/>
                 </a:solidFill>
@@ -5058,7 +5058,7 @@
               </a:lnSpc>
             </a:pPr>
             <a:r>
-              <a:rPr sz="3500" b="0">
+              <a:rPr sz="3500" b="0" lang="ko-KR" altLang="en-US">
                 <a:solidFill>
                   <a:srgbClr val="1E2A30"/>
                 </a:solidFill>
@@ -5141,7 +5141,7 @@
               </a:lnSpc>
             </a:pPr>
             <a:r>
-              <a:rPr sz="2200" b="0">
+              <a:rPr sz="2200" b="0" lang="ko-KR" altLang="en-US">
                 <a:solidFill>
                   <a:srgbClr val="6B7A80"/>
                 </a:solidFill>
@@ -5182,7 +5182,7 @@
               </a:lnSpc>
             </a:pPr>
             <a:r>
-              <a:rPr sz="2100" b="0">
+              <a:rPr sz="2100" b="0" lang="ko-KR" altLang="en-US">
                 <a:solidFill>
                   <a:srgbClr val="6B7A80"/>
                 </a:solidFill>
@@ -5309,7 +5309,7 @@
               </a:lnSpc>
             </a:pPr>
             <a:r>
-              <a:rPr sz="2500" b="0">
+              <a:rPr sz="2500" b="0" lang="ko-KR" altLang="en-US">
                 <a:solidFill>
                   <a:srgbClr val="2F5DA8"/>
                 </a:solidFill>
@@ -5350,7 +5350,7 @@
               </a:lnSpc>
             </a:pPr>
             <a:r>
-              <a:rPr sz="2300" b="0">
+              <a:rPr sz="2300" b="0" lang="ko-KR" altLang="en-US">
                 <a:solidFill>
                   <a:srgbClr val="1E2A30"/>
                 </a:solidFill>
@@ -5368,7 +5368,7 @@
               </a:lnSpc>
             </a:pPr>
             <a:r>
-              <a:rPr sz="2300" b="0">
+              <a:rPr sz="2300" b="0" lang="ko-KR" altLang="en-US">
                 <a:solidFill>
                   <a:srgbClr val="1E2A30"/>
                 </a:solidFill>
@@ -5409,7 +5409,7 @@
               </a:lnSpc>
             </a:pPr>
             <a:r>
-              <a:rPr sz="3300" b="0">
+              <a:rPr sz="3300" b="0" lang="ko-KR" altLang="en-US">
                 <a:solidFill>
                   <a:srgbClr val="6B7A80"/>
                 </a:solidFill>
@@ -5536,7 +5536,7 @@
               </a:lnSpc>
             </a:pPr>
             <a:r>
-              <a:rPr sz="2500" b="0">
+              <a:rPr sz="2500" b="0" lang="ko-KR" altLang="en-US">
                 <a:solidFill>
                   <a:srgbClr val="2F5DA8"/>
                 </a:solidFill>
@@ -5577,7 +5577,7 @@
               </a:lnSpc>
             </a:pPr>
             <a:r>
-              <a:rPr sz="2300" b="0">
+              <a:rPr sz="2300" b="0" lang="ko-KR" altLang="en-US">
                 <a:solidFill>
                   <a:srgbClr val="1E2A30"/>
                 </a:solidFill>
@@ -5595,7 +5595,7 @@
               </a:lnSpc>
             </a:pPr>
             <a:r>
-              <a:rPr sz="2300" b="0">
+              <a:rPr sz="2300" b="0" lang="ko-KR" altLang="en-US">
                 <a:solidFill>
                   <a:srgbClr val="1E2A30"/>
                 </a:solidFill>
@@ -5636,7 +5636,7 @@
               </a:lnSpc>
             </a:pPr>
             <a:r>
-              <a:rPr sz="3300" b="0">
+              <a:rPr sz="3300" b="0" lang="ko-KR" altLang="en-US">
                 <a:solidFill>
                   <a:srgbClr val="6B7A80"/>
                 </a:solidFill>
@@ -5763,7 +5763,7 @@
               </a:lnSpc>
             </a:pPr>
             <a:r>
-              <a:rPr sz="2500" b="0">
+              <a:rPr sz="2500" b="0" lang="ko-KR" altLang="en-US">
                 <a:solidFill>
                   <a:srgbClr val="2F5DA8"/>
                 </a:solidFill>
@@ -5804,7 +5804,7 @@
               </a:lnSpc>
             </a:pPr>
             <a:r>
-              <a:rPr sz="2300" b="0">
+              <a:rPr sz="2300" b="0" lang="ko-KR" altLang="en-US">
                 <a:solidFill>
                   <a:srgbClr val="1E2A30"/>
                 </a:solidFill>
@@ -5822,7 +5822,7 @@
               </a:lnSpc>
             </a:pPr>
             <a:r>
-              <a:rPr sz="2300" b="0">
+              <a:rPr sz="2300" b="0" lang="ko-KR" altLang="en-US">
                 <a:solidFill>
                   <a:srgbClr val="1E2A30"/>
                 </a:solidFill>
@@ -5863,7 +5863,7 @@
               </a:lnSpc>
             </a:pPr>
             <a:r>
-              <a:rPr sz="3300" b="0">
+              <a:rPr sz="3300" b="0" lang="ko-KR" altLang="en-US">
                 <a:solidFill>
                   <a:srgbClr val="6B7A80"/>
                 </a:solidFill>
@@ -5990,7 +5990,7 @@
               </a:lnSpc>
             </a:pPr>
             <a:r>
-              <a:rPr sz="2500" b="0">
+              <a:rPr sz="2500" b="0" lang="ko-KR" altLang="en-US">
                 <a:solidFill>
                   <a:srgbClr val="2F5DA8"/>
                 </a:solidFill>
@@ -6031,7 +6031,7 @@
               </a:lnSpc>
             </a:pPr>
             <a:r>
-              <a:rPr sz="2300" b="0">
+              <a:rPr sz="2300" b="0" lang="ko-KR" altLang="en-US">
                 <a:solidFill>
                   <a:srgbClr val="1E2A30"/>
                 </a:solidFill>
@@ -6049,7 +6049,7 @@
               </a:lnSpc>
             </a:pPr>
             <a:r>
-              <a:rPr sz="2300" b="0">
+              <a:rPr sz="2300" b="0" lang="ko-KR" altLang="en-US">
                 <a:solidFill>
                   <a:srgbClr val="1E2A30"/>
                 </a:solidFill>
@@ -6134,7 +6134,7 @@
               </a:lnSpc>
             </a:pPr>
             <a:r>
-              <a:rPr sz="2700" b="0">
+              <a:rPr sz="2700" b="0" lang="ko-KR" altLang="en-US">
                 <a:solidFill>
                   <a:srgbClr val="003956"/>
                 </a:solidFill>
@@ -6175,7 +6175,7 @@
               </a:lnSpc>
             </a:pPr>
             <a:r>
-              <a:rPr sz="2300" b="0">
+              <a:rPr sz="2300" b="0" lang="ko-KR" altLang="en-US">
                 <a:solidFill>
                   <a:srgbClr val="2F5DA8"/>
                 </a:solidFill>
@@ -6200,7 +6200,7 @@
               </a:lnSpc>
             </a:pPr>
             <a:r>
-              <a:rPr sz="2300" b="0">
+              <a:rPr sz="2300" b="0" lang="ko-KR" altLang="en-US">
                 <a:solidFill>
                   <a:srgbClr val="1E2A30"/>
                 </a:solidFill>
@@ -6211,7 +6211,7 @@
               <a:t>i(x, y) — 물체에 비친 </a:t>
             </a:r>
             <a:r>
-              <a:rPr sz="2300" b="0">
+              <a:rPr sz="2300" b="0" lang="ko-KR" altLang="en-US">
                 <a:solidFill>
                   <a:srgbClr val="2F5DA8"/>
                 </a:solidFill>
@@ -6229,7 +6229,7 @@
               </a:lnSpc>
             </a:pPr>
             <a:r>
-              <a:rPr sz="2300" b="0">
+              <a:rPr sz="2300" b="0" lang="ko-KR" altLang="en-US">
                 <a:solidFill>
                   <a:srgbClr val="1E2A30"/>
                 </a:solidFill>
@@ -6240,7 +6240,7 @@
               <a:t>r(x, y) — 표면의 </a:t>
             </a:r>
             <a:r>
-              <a:rPr sz="2300" b="0">
+              <a:rPr sz="2300" b="0" lang="ko-KR" altLang="en-US">
                 <a:solidFill>
                   <a:srgbClr val="2F5DA8"/>
                 </a:solidFill>
@@ -6251,7 +6251,7 @@
               <a:t>반사 계수</a:t>
             </a:r>
             <a:r>
-              <a:rPr sz="2300" b="0">
+              <a:rPr sz="2300" b="0" lang="ko-KR" altLang="en-US">
                 <a:solidFill>
                   <a:srgbClr val="1E2A30"/>
                 </a:solidFill>
@@ -6276,7 +6276,7 @@
               </a:lnSpc>
             </a:pPr>
             <a:r>
-              <a:rPr sz="2300" b="0">
+              <a:rPr sz="2300" b="0" lang="ko-KR" altLang="en-US">
                 <a:solidFill>
                   <a:srgbClr val="1E2A30"/>
                 </a:solidFill>
@@ -6361,7 +6361,7 @@
               </a:lnSpc>
             </a:pPr>
             <a:r>
-              <a:rPr sz="2700" b="0">
+              <a:rPr sz="2700" b="0" lang="ko-KR" altLang="en-US">
                 <a:solidFill>
                   <a:srgbClr val="003956"/>
                 </a:solidFill>
@@ -6402,7 +6402,7 @@
               </a:lnSpc>
             </a:pPr>
             <a:r>
-              <a:rPr sz="2300" b="0">
+              <a:rPr sz="2300" b="0" lang="ko-KR" altLang="en-US">
                 <a:solidFill>
                   <a:srgbClr val="1E2A30"/>
                 </a:solidFill>
@@ -6420,7 +6420,7 @@
               </a:lnSpc>
             </a:pPr>
             <a:r>
-              <a:rPr sz="2300" b="0">
+              <a:rPr sz="2300" b="0" lang="ko-KR" altLang="en-US">
                 <a:solidFill>
                   <a:srgbClr val="1E2A30"/>
                 </a:solidFill>
@@ -6438,7 +6438,7 @@
               </a:lnSpc>
             </a:pPr>
             <a:r>
-              <a:rPr sz="2300" b="0">
+              <a:rPr sz="2300" b="0" lang="ko-KR" altLang="en-US">
                 <a:solidFill>
                   <a:srgbClr val="1E2A30"/>
                 </a:solidFill>
@@ -6463,7 +6463,7 @@
               </a:lnSpc>
             </a:pPr>
             <a:r>
-              <a:rPr sz="2300" b="0">
+              <a:rPr sz="2300" b="0" lang="ko-KR" altLang="en-US">
                 <a:solidFill>
                   <a:srgbClr val="1E2A30"/>
                 </a:solidFill>
@@ -6481,7 +6481,7 @@
               </a:lnSpc>
             </a:pPr>
             <a:r>
-              <a:rPr sz="2300" b="0">
+              <a:rPr sz="2300" b="0" lang="ko-KR" altLang="en-US">
                 <a:solidFill>
                   <a:srgbClr val="1E2A30"/>
                 </a:solidFill>
@@ -6564,7 +6564,7 @@
               </a:lnSpc>
             </a:pPr>
             <a:r>
-              <a:rPr sz="2200" b="0">
+              <a:rPr sz="2200" b="0" lang="ko-KR" altLang="en-US">
                 <a:solidFill>
                   <a:srgbClr val="6B7A80"/>
                 </a:solidFill>
@@ -6582,7 +6582,7 @@
               </a:lnSpc>
             </a:pPr>
             <a:r>
-              <a:rPr sz="2200" b="0">
+              <a:rPr sz="2200" b="0" lang="ko-KR" altLang="en-US">
                 <a:solidFill>
                   <a:srgbClr val="6B7A80"/>
                 </a:solidFill>
@@ -6717,7 +6717,7 @@
               </a:lnSpc>
             </a:pPr>
             <a:r>
-              <a:rPr sz="1250" b="0">
+              <a:rPr sz="1250" b="0" lang="ko-KR" altLang="en-US">
                 <a:solidFill>
                   <a:srgbClr val="003956"/>
                 </a:solidFill>
@@ -6735,7 +6735,7 @@
               </a:lnSpc>
             </a:pPr>
             <a:r>
-              <a:rPr sz="1250" b="0">
+              <a:rPr sz="1250" b="0" lang="ko-KR" altLang="en-US">
                 <a:solidFill>
                   <a:srgbClr val="003956"/>
                 </a:solidFill>
@@ -6776,7 +6776,7 @@
               </a:lnSpc>
             </a:pPr>
             <a:r>
-              <a:rPr sz="1600" b="0">
+              <a:rPr sz="1600" b="0" lang="ko-KR" altLang="en-US">
                 <a:solidFill>
                   <a:srgbClr val="96A8A7"/>
                 </a:solidFill>
@@ -6861,7 +6861,7 @@
               </a:lnSpc>
             </a:pPr>
             <a:r>
-              <a:rPr sz="3500" b="0">
+              <a:rPr sz="3500" b="0" lang="ko-KR" altLang="en-US">
                 <a:solidFill>
                   <a:srgbClr val="1E2A30"/>
                 </a:solidFill>
@@ -6944,7 +6944,7 @@
               </a:lnSpc>
             </a:pPr>
             <a:r>
-              <a:rPr sz="2200" b="0">
+              <a:rPr sz="2200" b="0" lang="ko-KR" altLang="en-US">
                 <a:solidFill>
                   <a:srgbClr val="6B7A80"/>
                 </a:solidFill>
@@ -6985,7 +6985,7 @@
               </a:lnSpc>
             </a:pPr>
             <a:r>
-              <a:rPr sz="2100" b="0">
+              <a:rPr sz="2100" b="0" lang="ko-KR" altLang="en-US">
                 <a:solidFill>
                   <a:srgbClr val="6B7A80"/>
                 </a:solidFill>
@@ -7140,7 +7140,7 @@
               </a:lnSpc>
             </a:pPr>
             <a:r>
-              <a:rPr sz="2300" b="0">
+              <a:rPr sz="2300" b="0" lang="ko-KR" altLang="en-US">
                 <a:solidFill>
                   <a:srgbClr val="6B7A80"/>
                 </a:solidFill>
@@ -7225,7 +7225,7 @@
               </a:lnSpc>
             </a:pPr>
             <a:r>
-              <a:rPr sz="2900" b="0">
+              <a:rPr sz="2900" b="0" lang="ko-KR" altLang="en-US">
                 <a:solidFill>
                   <a:srgbClr val="1E2A30"/>
                 </a:solidFill>
@@ -7352,7 +7352,7 @@
               </a:lnSpc>
             </a:pPr>
             <a:r>
-              <a:rPr sz="2900" b="0">
+              <a:rPr sz="2900" b="0" lang="ko-KR" altLang="en-US">
                 <a:solidFill>
                   <a:srgbClr val="1E2A30"/>
                 </a:solidFill>
@@ -7435,7 +7435,7 @@
               </a:lnSpc>
             </a:pPr>
             <a:r>
-              <a:rPr sz="2800" b="0">
+              <a:rPr sz="2800" b="0" lang="ko-KR" altLang="en-US">
                 <a:solidFill>
                   <a:srgbClr val="2F5DA8"/>
                 </a:solidFill>
@@ -7446,7 +7446,7 @@
               <a:t>몇 칸</a:t>
             </a:r>
             <a:r>
-              <a:rPr sz="2800" b="0">
+              <a:rPr sz="2800" b="0" lang="ko-KR" altLang="en-US">
                 <a:solidFill>
                   <a:srgbClr val="1E2A30"/>
                 </a:solidFill>
@@ -7487,7 +7487,7 @@
               </a:lnSpc>
             </a:pPr>
             <a:r>
-              <a:rPr sz="2800" b="0">
+              <a:rPr sz="2800" b="0" lang="ko-KR" altLang="en-US">
                 <a:solidFill>
                   <a:srgbClr val="2F5DA8"/>
                 </a:solidFill>
@@ -7498,7 +7498,7 @@
               <a:t>몇 단계</a:t>
             </a:r>
             <a:r>
-              <a:rPr sz="2800" b="0">
+              <a:rPr sz="2800" b="0" lang="ko-KR" altLang="en-US">
                 <a:solidFill>
                   <a:srgbClr val="1E2A30"/>
                 </a:solidFill>
@@ -7581,7 +7581,7 @@
               </a:lnSpc>
             </a:pPr>
             <a:r>
-              <a:rPr sz="2200" b="0">
+              <a:rPr sz="2200" b="0" lang="ko-KR" altLang="en-US">
                 <a:solidFill>
                   <a:srgbClr val="6B7A80"/>
                 </a:solidFill>
@@ -7599,7 +7599,7 @@
               </a:lnSpc>
             </a:pPr>
             <a:r>
-              <a:rPr sz="2200" b="0">
+              <a:rPr sz="2200" b="0" lang="ko-KR" altLang="en-US">
                 <a:solidFill>
                   <a:srgbClr val="6B7A80"/>
                 </a:solidFill>
@@ -7734,7 +7734,7 @@
               </a:lnSpc>
             </a:pPr>
             <a:r>
-              <a:rPr sz="1250" b="0">
+              <a:rPr sz="1250" b="0" lang="ko-KR" altLang="en-US">
                 <a:solidFill>
                   <a:srgbClr val="003956"/>
                 </a:solidFill>
@@ -7752,7 +7752,7 @@
               </a:lnSpc>
             </a:pPr>
             <a:r>
-              <a:rPr sz="1250" b="0">
+              <a:rPr sz="1250" b="0" lang="ko-KR" altLang="en-US">
                 <a:solidFill>
                   <a:srgbClr val="003956"/>
                 </a:solidFill>
@@ -7793,7 +7793,7 @@
               </a:lnSpc>
             </a:pPr>
             <a:r>
-              <a:rPr sz="1600" b="0">
+              <a:rPr sz="1600" b="0" lang="ko-KR" altLang="en-US">
                 <a:solidFill>
                   <a:srgbClr val="96A8A7"/>
                 </a:solidFill>
@@ -7878,7 +7878,7 @@
               </a:lnSpc>
             </a:pPr>
             <a:r>
-              <a:rPr sz="3500" b="0">
+              <a:rPr sz="3500" b="0" lang="ko-KR" altLang="en-US">
                 <a:solidFill>
                   <a:srgbClr val="1E2A30"/>
                 </a:solidFill>
@@ -7961,7 +7961,7 @@
               </a:lnSpc>
             </a:pPr>
             <a:r>
-              <a:rPr sz="2200" b="0">
+              <a:rPr sz="2200" b="0" lang="ko-KR" altLang="en-US">
                 <a:solidFill>
                   <a:srgbClr val="6B7A80"/>
                 </a:solidFill>
@@ -8002,7 +8002,7 @@
               </a:lnSpc>
             </a:pPr>
             <a:r>
-              <a:rPr sz="2100" b="0">
+              <a:rPr sz="2100" b="0" lang="ko-KR" altLang="en-US">
                 <a:solidFill>
                   <a:srgbClr val="6B7A80"/>
                 </a:solidFill>
@@ -8157,7 +8157,7 @@
               </a:lnSpc>
             </a:pPr>
             <a:r>
-              <a:rPr sz="2300" b="0">
+              <a:rPr sz="2300" b="0" lang="ko-KR" altLang="en-US">
                 <a:solidFill>
                   <a:srgbClr val="6B7A80"/>
                 </a:solidFill>
@@ -8242,7 +8242,7 @@
               </a:lnSpc>
             </a:pPr>
             <a:r>
-              <a:rPr sz="2700" b="0">
+              <a:rPr sz="2700" b="0" lang="ko-KR" altLang="en-US">
                 <a:solidFill>
                   <a:srgbClr val="003956"/>
                 </a:solidFill>
@@ -8283,7 +8283,7 @@
               </a:lnSpc>
             </a:pPr>
             <a:r>
-              <a:rPr sz="2500" b="0">
+              <a:rPr sz="2400" b="0" lang="ko-KR" altLang="en-US">
                 <a:solidFill>
                   <a:srgbClr val="1E2A30"/>
                 </a:solidFill>
@@ -8294,7 +8294,7 @@
               <a:t>크기 — </a:t>
             </a:r>
             <a:r>
-              <a:rPr sz="2500" b="0">
+              <a:rPr sz="2400" b="0" lang="ko-KR" altLang="en-US">
                 <a:solidFill>
                   <a:srgbClr val="2F5DA8"/>
                 </a:solidFill>
@@ -8305,7 +8305,7 @@
               <a:t>M × N</a:t>
             </a:r>
             <a:r>
-              <a:rPr sz="2500" b="0">
+              <a:rPr sz="2400" b="0" lang="ko-KR" altLang="en-US">
                 <a:solidFill>
                   <a:srgbClr val="1E2A30"/>
                 </a:solidFill>
@@ -8330,7 +8330,7 @@
               </a:lnSpc>
             </a:pPr>
             <a:r>
-              <a:rPr sz="2500" b="0">
+              <a:rPr sz="2400" b="0" lang="ko-KR" altLang="en-US">
                 <a:solidFill>
                   <a:srgbClr val="1E2A30"/>
                 </a:solidFill>
@@ -8341,7 +8341,7 @@
               <a:t>밝기 단계 — </a:t>
             </a:r>
             <a:r>
-              <a:rPr sz="2500" b="0">
+              <a:rPr sz="2400" b="0" lang="ko-KR" altLang="en-US">
                 <a:solidFill>
                   <a:srgbClr val="2F5DA8"/>
                 </a:solidFill>
@@ -8359,7 +8359,7 @@
               </a:lnSpc>
             </a:pPr>
             <a:r>
-              <a:rPr sz="2500" b="0">
+              <a:rPr sz="2400" b="0" lang="ko-KR" altLang="en-US">
                 <a:solidFill>
                   <a:srgbClr val="1E2A30"/>
                 </a:solidFill>
@@ -8384,7 +8384,7 @@
               </a:lnSpc>
             </a:pPr>
             <a:r>
-              <a:rPr sz="2500" b="0">
+              <a:rPr sz="2400" b="0" lang="ko-KR" altLang="en-US">
                 <a:solidFill>
                   <a:srgbClr val="1E2A30"/>
                 </a:solidFill>
@@ -8395,7 +8395,7 @@
               <a:t>저장 공간 — </a:t>
             </a:r>
             <a:r>
-              <a:rPr sz="2500" b="0">
+              <a:rPr sz="2400" b="0" lang="ko-KR" altLang="en-US">
                 <a:solidFill>
                   <a:srgbClr val="2F5DA8"/>
                 </a:solidFill>
@@ -8478,7 +8478,7 @@
               </a:lnSpc>
             </a:pPr>
             <a:r>
-              <a:rPr sz="2200" b="0">
+              <a:rPr sz="2200" b="0" lang="ko-KR" altLang="en-US">
                 <a:solidFill>
                   <a:srgbClr val="6B7A80"/>
                 </a:solidFill>
@@ -8496,7 +8496,7 @@
               </a:lnSpc>
             </a:pPr>
             <a:r>
-              <a:rPr sz="2200" b="0">
+              <a:rPr sz="2200" b="0" lang="ko-KR" altLang="en-US">
                 <a:solidFill>
                   <a:srgbClr val="6B7A80"/>
                 </a:solidFill>
@@ -8631,7 +8631,7 @@
               </a:lnSpc>
             </a:pPr>
             <a:r>
-              <a:rPr sz="1250" b="0">
+              <a:rPr sz="1250" b="0" lang="ko-KR" altLang="en-US">
                 <a:solidFill>
                   <a:srgbClr val="003956"/>
                 </a:solidFill>
@@ -8649,7 +8649,7 @@
               </a:lnSpc>
             </a:pPr>
             <a:r>
-              <a:rPr sz="1250" b="0">
+              <a:rPr sz="1250" b="0" lang="ko-KR" altLang="en-US">
                 <a:solidFill>
                   <a:srgbClr val="003956"/>
                 </a:solidFill>
@@ -8690,7 +8690,7 @@
               </a:lnSpc>
             </a:pPr>
             <a:r>
-              <a:rPr sz="1600" b="0">
+              <a:rPr sz="1600" b="0" lang="ko-KR" altLang="en-US">
                 <a:solidFill>
                   <a:srgbClr val="96A8A7"/>
                 </a:solidFill>
@@ -8775,7 +8775,7 @@
               </a:lnSpc>
             </a:pPr>
             <a:r>
-              <a:rPr sz="3500" b="0">
+              <a:rPr sz="3500" b="0" lang="ko-KR" altLang="en-US">
                 <a:solidFill>
                   <a:srgbClr val="1E2A30"/>
                 </a:solidFill>
@@ -8858,7 +8858,7 @@
               </a:lnSpc>
             </a:pPr>
             <a:r>
-              <a:rPr sz="2200" b="0">
+              <a:rPr sz="2200" b="0" lang="ko-KR" altLang="en-US">
                 <a:solidFill>
                   <a:srgbClr val="6B7A80"/>
                 </a:solidFill>
@@ -8899,7 +8899,7 @@
               </a:lnSpc>
             </a:pPr>
             <a:r>
-              <a:rPr sz="2100" b="0">
+              <a:rPr sz="2100" b="0" lang="ko-KR" altLang="en-US">
                 <a:solidFill>
                   <a:srgbClr val="6B7A80"/>
                 </a:solidFill>
@@ -8984,7 +8984,7 @@
               </a:lnSpc>
             </a:pPr>
             <a:r>
-              <a:rPr sz="2200" b="0">
+              <a:rPr sz="2200" b="0" lang="ko-KR" altLang="en-US">
                 <a:solidFill>
                   <a:srgbClr val="FFFFFF"/>
                 </a:solidFill>
@@ -9025,7 +9025,7 @@
               </a:lnSpc>
             </a:pPr>
             <a:r>
-              <a:rPr sz="2900" b="0">
+              <a:rPr sz="2900" b="0" lang="ko-KR" altLang="en-US">
                 <a:solidFill>
                   <a:srgbClr val="1E2A30"/>
                 </a:solidFill>
@@ -9036,7 +9036,7 @@
               <a:t>문제 — 그레이 레벨 256, 크기 </a:t>
             </a:r>
             <a:r>
-              <a:rPr sz="2900" b="0">
+              <a:rPr sz="2900" b="0" lang="ko-KR" altLang="en-US">
                 <a:solidFill>
                   <a:srgbClr val="2F5DA8"/>
                 </a:solidFill>
@@ -9047,7 +9047,7 @@
               <a:t>1,024 × 768</a:t>
             </a:r>
             <a:r>
-              <a:rPr sz="2900" b="0">
+              <a:rPr sz="2900" b="0" lang="ko-KR" altLang="en-US">
                 <a:solidFill>
                   <a:srgbClr val="1E2A30"/>
                 </a:solidFill>
@@ -9132,7 +9132,7 @@
               </a:lnSpc>
             </a:pPr>
             <a:r>
-              <a:rPr sz="2200" b="0">
+              <a:rPr sz="2200" b="0" lang="ko-KR" altLang="en-US">
                 <a:solidFill>
                   <a:srgbClr val="FFFFFF"/>
                 </a:solidFill>
@@ -9173,7 +9173,7 @@
               </a:lnSpc>
             </a:pPr>
             <a:r>
-              <a:rPr sz="2900" b="0">
+              <a:rPr sz="2900" b="0" lang="ko-KR" altLang="en-US">
                 <a:solidFill>
                   <a:srgbClr val="1E2A30"/>
                 </a:solidFill>
@@ -9184,7 +9184,7 @@
               <a:t>그레이 레벨 256 = 2^8  →  </a:t>
             </a:r>
             <a:r>
-              <a:rPr sz="2900" b="0">
+              <a:rPr sz="2900" b="0" lang="ko-KR" altLang="en-US">
                 <a:solidFill>
                   <a:srgbClr val="2F5DA8"/>
                 </a:solidFill>
@@ -9269,7 +9269,7 @@
               </a:lnSpc>
             </a:pPr>
             <a:r>
-              <a:rPr sz="2200" b="0">
+              <a:rPr sz="2200" b="0" lang="ko-KR" altLang="en-US">
                 <a:solidFill>
                   <a:srgbClr val="FFFFFF"/>
                 </a:solidFill>
@@ -9310,7 +9310,7 @@
               </a:lnSpc>
             </a:pPr>
             <a:r>
-              <a:rPr sz="2900" b="0">
+              <a:rPr sz="2900" b="0" lang="ko-KR" altLang="en-US">
                 <a:solidFill>
                   <a:srgbClr val="1E2A30"/>
                 </a:solidFill>
@@ -9321,7 +9321,7 @@
               <a:t>S = M × N × k = 1024 × 768 × 8 = </a:t>
             </a:r>
             <a:r>
-              <a:rPr sz="2900" b="0">
+              <a:rPr sz="2900" b="0" lang="ko-KR" altLang="en-US">
                 <a:solidFill>
                   <a:srgbClr val="2F5DA8"/>
                 </a:solidFill>
@@ -9406,7 +9406,7 @@
               </a:lnSpc>
             </a:pPr>
             <a:r>
-              <a:rPr sz="2200" b="0">
+              <a:rPr sz="2200" b="0" lang="ko-KR" altLang="en-US">
                 <a:solidFill>
                   <a:srgbClr val="FFFFFF"/>
                 </a:solidFill>
@@ -9447,7 +9447,7 @@
               </a:lnSpc>
             </a:pPr>
             <a:r>
-              <a:rPr sz="2900" b="0">
+              <a:rPr sz="2900" b="0" lang="ko-KR" altLang="en-US">
                 <a:solidFill>
                   <a:srgbClr val="1E2A30"/>
                 </a:solidFill>
@@ -9458,7 +9458,7 @@
               <a:t>8로 나누면 786,432 바이트 = </a:t>
             </a:r>
             <a:r>
-              <a:rPr sz="2900" b="0">
+              <a:rPr sz="2900" b="0" lang="ko-KR" altLang="en-US">
                 <a:solidFill>
                   <a:srgbClr val="2F5DA8"/>
                 </a:solidFill>
@@ -9545,7 +9545,7 @@
               </a:lnSpc>
             </a:pPr>
             <a:r>
-              <a:rPr sz="2600" b="0">
+              <a:rPr sz="2600" b="0" lang="ko-KR" altLang="en-US">
                 <a:solidFill>
                   <a:srgbClr val="C1662F"/>
                 </a:solidFill>
@@ -9586,7 +9586,7 @@
               </a:lnSpc>
             </a:pPr>
             <a:r>
-              <a:rPr sz="3000" b="0">
+              <a:rPr sz="3000" b="0" lang="ko-KR" altLang="en-US">
                 <a:solidFill>
                   <a:srgbClr val="1E2A30"/>
                 </a:solidFill>
@@ -9597,7 +9597,7 @@
               <a:t>S 공식의 결과는 </a:t>
             </a:r>
             <a:r>
-              <a:rPr sz="3000" b="0">
+              <a:rPr sz="3000" b="0" lang="ko-KR" altLang="en-US">
                 <a:solidFill>
                   <a:srgbClr val="2F5DA8"/>
                 </a:solidFill>
@@ -9608,7 +9608,7 @@
               <a:t>비트</a:t>
             </a:r>
             <a:r>
-              <a:rPr sz="3000" b="0">
+              <a:rPr sz="3000" b="0" lang="ko-KR" altLang="en-US">
                 <a:solidFill>
                   <a:srgbClr val="1E2A30"/>
                 </a:solidFill>
@@ -9626,7 +9626,7 @@
               </a:lnSpc>
             </a:pPr>
             <a:r>
-              <a:rPr sz="3000" b="0">
+              <a:rPr sz="3000" b="0" lang="ko-KR" altLang="en-US">
                 <a:solidFill>
                   <a:srgbClr val="1E2A30"/>
                 </a:solidFill>
@@ -9709,7 +9709,7 @@
               </a:lnSpc>
             </a:pPr>
             <a:r>
-              <a:rPr sz="2200" b="0">
+              <a:rPr sz="2200" b="0" lang="ko-KR" altLang="en-US">
                 <a:solidFill>
                   <a:srgbClr val="6B7A80"/>
                 </a:solidFill>
@@ -9844,7 +9844,7 @@
               </a:lnSpc>
             </a:pPr>
             <a:r>
-              <a:rPr sz="1250" b="0">
+              <a:rPr sz="1250" b="0" lang="ko-KR" altLang="en-US">
                 <a:solidFill>
                   <a:srgbClr val="003956"/>
                 </a:solidFill>
@@ -9862,7 +9862,7 @@
               </a:lnSpc>
             </a:pPr>
             <a:r>
-              <a:rPr sz="1250" b="0">
+              <a:rPr sz="1250" b="0" lang="ko-KR" altLang="en-US">
                 <a:solidFill>
                   <a:srgbClr val="003956"/>
                 </a:solidFill>
@@ -9903,7 +9903,7 @@
               </a:lnSpc>
             </a:pPr>
             <a:r>
-              <a:rPr sz="1600" b="0">
+              <a:rPr sz="1600" b="0" lang="ko-KR" altLang="en-US">
                 <a:solidFill>
                   <a:srgbClr val="96A8A7"/>
                 </a:solidFill>
@@ -9988,7 +9988,7 @@
               </a:lnSpc>
             </a:pPr>
             <a:r>
-              <a:rPr sz="3500" b="0">
+              <a:rPr sz="3500" b="0" lang="ko-KR" altLang="en-US">
                 <a:solidFill>
                   <a:srgbClr val="1E2A30"/>
                 </a:solidFill>
@@ -10071,7 +10071,7 @@
               </a:lnSpc>
             </a:pPr>
             <a:r>
-              <a:rPr sz="2200" b="0">
+              <a:rPr sz="2200" b="0" lang="ko-KR" altLang="en-US">
                 <a:solidFill>
                   <a:srgbClr val="6B7A80"/>
                 </a:solidFill>
@@ -10112,7 +10112,7 @@
               </a:lnSpc>
             </a:pPr>
             <a:r>
-              <a:rPr sz="2100" b="0">
+              <a:rPr sz="2100" b="0" lang="ko-KR" altLang="en-US">
                 <a:solidFill>
                   <a:srgbClr val="6B7A80"/>
                 </a:solidFill>
@@ -10153,7 +10153,7 @@
               </a:lnSpc>
             </a:pPr>
             <a:r>
-              <a:rPr sz="4500" b="0">
+              <a:rPr sz="4500" b="0" lang="ko-KR" altLang="en-US">
                 <a:solidFill>
                   <a:srgbClr val="1E2A30"/>
                 </a:solidFill>
@@ -10234,11 +10234,11 @@
           <a:p>
             <a:pPr algn="ctr">
               <a:lnSpc>
-                <a:spcPct val="125000"/>
-              </a:lnSpc>
-            </a:pPr>
-            <a:r>
-              <a:rPr sz="2500" b="0">
+                <a:spcPct val="115000"/>
+              </a:lnSpc>
+            </a:pPr>
+            <a:r>
+              <a:rPr sz="2500" b="0" lang="ko-KR" altLang="en-US">
                 <a:solidFill>
                   <a:srgbClr val="2F5DA8"/>
                 </a:solidFill>
@@ -10275,11 +10275,11 @@
           <a:p>
             <a:pPr algn="ctr">
               <a:lnSpc>
-                <a:spcPct val="125000"/>
-              </a:lnSpc>
-            </a:pPr>
-            <a:r>
-              <a:rPr sz="2500" b="0">
+                <a:spcPct val="115000"/>
+              </a:lnSpc>
+            </a:pPr>
+            <a:r>
+              <a:rPr sz="2500" b="0" lang="ko-KR" altLang="en-US">
                 <a:solidFill>
                   <a:srgbClr val="2F5DA8"/>
                 </a:solidFill>
@@ -10364,7 +10364,7 @@
               </a:lnSpc>
             </a:pPr>
             <a:r>
-              <a:rPr sz="2600" b="0">
+              <a:rPr sz="2600" b="0" lang="ko-KR" altLang="en-US">
                 <a:solidFill>
                   <a:srgbClr val="1E2A30"/>
                 </a:solidFill>
@@ -10405,7 +10405,7 @@
               </a:lnSpc>
             </a:pPr>
             <a:r>
-              <a:rPr sz="2600" b="0">
+              <a:rPr sz="2600" b="0" lang="ko-KR" altLang="en-US">
                 <a:solidFill>
                   <a:srgbClr val="1E2A30"/>
                 </a:solidFill>
@@ -10446,7 +10446,7 @@
               </a:lnSpc>
             </a:pPr>
             <a:r>
-              <a:rPr sz="2600" b="0">
+              <a:rPr sz="2600" b="0" lang="ko-KR" altLang="en-US">
                 <a:solidFill>
                   <a:srgbClr val="1E2A30"/>
                 </a:solidFill>
@@ -10487,7 +10487,7 @@
               </a:lnSpc>
             </a:pPr>
             <a:r>
-              <a:rPr sz="2600" b="0">
+              <a:rPr sz="2600" b="0" lang="ko-KR" altLang="en-US">
                 <a:solidFill>
                   <a:srgbClr val="1E2A30"/>
                 </a:solidFill>
@@ -10572,7 +10572,7 @@
               </a:lnSpc>
             </a:pPr>
             <a:r>
-              <a:rPr sz="2600" b="0">
+              <a:rPr sz="2600" b="0" lang="ko-KR" altLang="en-US">
                 <a:solidFill>
                   <a:srgbClr val="1E2A30"/>
                 </a:solidFill>
@@ -10613,7 +10613,7 @@
               </a:lnSpc>
             </a:pPr>
             <a:r>
-              <a:rPr sz="2600" b="0">
+              <a:rPr sz="2600" b="0" lang="ko-KR" altLang="en-US">
                 <a:solidFill>
                   <a:srgbClr val="1E2A30"/>
                 </a:solidFill>
@@ -10698,7 +10698,7 @@
               </a:lnSpc>
             </a:pPr>
             <a:r>
-              <a:rPr sz="2400" b="0">
+              <a:rPr sz="2400" b="0" lang="ko-KR" altLang="en-US">
                 <a:solidFill>
                   <a:srgbClr val="003956"/>
                 </a:solidFill>
@@ -10739,7 +10739,7 @@
               </a:lnSpc>
             </a:pPr>
             <a:r>
-              <a:rPr sz="2200" b="0">
+              <a:rPr sz="2200" b="0" lang="ko-KR" altLang="en-US">
                 <a:solidFill>
                   <a:srgbClr val="1E2A30"/>
                 </a:solidFill>
@@ -10750,7 +10750,7 @@
               <a:t>2부에서 배울 모든 기법이 결국 </a:t>
             </a:r>
             <a:r>
-              <a:rPr sz="2200" b="0">
+              <a:rPr sz="2200" b="0" lang="ko-KR" altLang="en-US">
                 <a:solidFill>
                   <a:srgbClr val="2F5DA8"/>
                 </a:solidFill>
@@ -10761,7 +10761,7 @@
               <a:t>T를 무엇으로 정하느냐</a:t>
             </a:r>
             <a:r>
-              <a:rPr sz="2200" b="0">
+              <a:rPr sz="2200" b="0" lang="ko-KR" altLang="en-US">
                 <a:solidFill>
                   <a:srgbClr val="1E2A30"/>
                 </a:solidFill>
@@ -10844,7 +10844,7 @@
               </a:lnSpc>
             </a:pPr>
             <a:r>
-              <a:rPr sz="2200" b="0">
+              <a:rPr sz="2200" b="0" lang="ko-KR" altLang="en-US">
                 <a:solidFill>
                   <a:srgbClr val="6B7A80"/>
                 </a:solidFill>
@@ -10979,7 +10979,7 @@
               </a:lnSpc>
             </a:pPr>
             <a:r>
-              <a:rPr sz="1250" b="0">
+              <a:rPr sz="1250" b="0" lang="ko-KR" altLang="en-US">
                 <a:solidFill>
                   <a:srgbClr val="003956"/>
                 </a:solidFill>
@@ -10997,7 +10997,7 @@
               </a:lnSpc>
             </a:pPr>
             <a:r>
-              <a:rPr sz="1250" b="0">
+              <a:rPr sz="1250" b="0" lang="ko-KR" altLang="en-US">
                 <a:solidFill>
                   <a:srgbClr val="003956"/>
                 </a:solidFill>
@@ -11038,7 +11038,7 @@
               </a:lnSpc>
             </a:pPr>
             <a:r>
-              <a:rPr sz="1600" b="0">
+              <a:rPr sz="1600" b="0" lang="ko-KR" altLang="en-US">
                 <a:solidFill>
                   <a:srgbClr val="96A8A7"/>
                 </a:solidFill>
@@ -11123,7 +11123,7 @@
               </a:lnSpc>
             </a:pPr>
             <a:r>
-              <a:rPr sz="3500" b="0">
+              <a:rPr sz="3500" b="0" lang="ko-KR" altLang="en-US">
                 <a:solidFill>
                   <a:srgbClr val="1E2A30"/>
                 </a:solidFill>
@@ -11206,7 +11206,7 @@
               </a:lnSpc>
             </a:pPr>
             <a:r>
-              <a:rPr sz="2200" b="0">
+              <a:rPr sz="2200" b="0" lang="ko-KR" altLang="en-US">
                 <a:solidFill>
                   <a:srgbClr val="6B7A80"/>
                 </a:solidFill>
@@ -11247,7 +11247,7 @@
               </a:lnSpc>
             </a:pPr>
             <a:r>
-              <a:rPr sz="2100" b="0">
+              <a:rPr sz="2100" b="0" lang="ko-KR" altLang="en-US">
                 <a:solidFill>
                   <a:srgbClr val="6B7A80"/>
                 </a:solidFill>
@@ -11332,7 +11332,7 @@
               </a:lnSpc>
             </a:pPr>
             <a:r>
-              <a:rPr sz="2600" b="0">
+              <a:rPr sz="2600" b="0" lang="ko-KR" altLang="en-US">
                 <a:solidFill>
                   <a:srgbClr val="1E2A30"/>
                 </a:solidFill>
@@ -11373,7 +11373,7 @@
               </a:lnSpc>
             </a:pPr>
             <a:r>
-              <a:rPr sz="2600" b="0">
+              <a:rPr sz="2600" b="0" lang="ko-KR" altLang="en-US">
                 <a:solidFill>
                   <a:srgbClr val="1E2A30"/>
                 </a:solidFill>
@@ -11391,7 +11391,7 @@
               </a:lnSpc>
             </a:pPr>
             <a:r>
-              <a:rPr sz="2600" b="0">
+              <a:rPr sz="2600" b="0" lang="ko-KR" altLang="en-US">
                 <a:solidFill>
                   <a:srgbClr val="1E2A30"/>
                 </a:solidFill>
@@ -11476,7 +11476,7 @@
               </a:lnSpc>
             </a:pPr>
             <a:r>
-              <a:rPr sz="2600" b="0">
+              <a:rPr sz="2600" b="0" lang="ko-KR" altLang="en-US">
                 <a:solidFill>
                   <a:srgbClr val="1E2A30"/>
                 </a:solidFill>
@@ -11517,7 +11517,7 @@
               </a:lnSpc>
             </a:pPr>
             <a:r>
-              <a:rPr sz="2600" b="0">
+              <a:rPr sz="2600" b="0" lang="ko-KR" altLang="en-US">
                 <a:solidFill>
                   <a:srgbClr val="1E2A30"/>
                 </a:solidFill>
@@ -11535,7 +11535,7 @@
               </a:lnSpc>
             </a:pPr>
             <a:r>
-              <a:rPr sz="2600" b="0">
+              <a:rPr sz="2600" b="0" lang="ko-KR" altLang="en-US">
                 <a:solidFill>
                   <a:srgbClr val="1E2A30"/>
                 </a:solidFill>
@@ -11620,7 +11620,7 @@
               </a:lnSpc>
             </a:pPr>
             <a:r>
-              <a:rPr sz="2600" b="0">
+              <a:rPr sz="2600" b="0" lang="ko-KR" altLang="en-US">
                 <a:solidFill>
                   <a:srgbClr val="1E2A30"/>
                 </a:solidFill>
@@ -11661,7 +11661,7 @@
               </a:lnSpc>
             </a:pPr>
             <a:r>
-              <a:rPr sz="2600" b="0">
+              <a:rPr sz="2600" b="0" lang="ko-KR" altLang="en-US">
                 <a:solidFill>
                   <a:srgbClr val="1E2A30"/>
                 </a:solidFill>
@@ -11679,7 +11679,7 @@
               </a:lnSpc>
             </a:pPr>
             <a:r>
-              <a:rPr sz="2600" b="0">
+              <a:rPr sz="2600" b="0" lang="ko-KR" altLang="en-US">
                 <a:solidFill>
                   <a:srgbClr val="1E2A30"/>
                 </a:solidFill>
@@ -11764,7 +11764,7 @@
               </a:lnSpc>
             </a:pPr>
             <a:r>
-              <a:rPr sz="2600" b="0">
+              <a:rPr sz="2600" b="0" lang="ko-KR" altLang="en-US">
                 <a:solidFill>
                   <a:srgbClr val="1E2A30"/>
                 </a:solidFill>
@@ -11805,7 +11805,7 @@
               </a:lnSpc>
             </a:pPr>
             <a:r>
-              <a:rPr sz="2600" b="0">
+              <a:rPr sz="2600" b="0" lang="ko-KR" altLang="en-US">
                 <a:solidFill>
                   <a:srgbClr val="1E2A30"/>
                 </a:solidFill>
@@ -11823,7 +11823,7 @@
               </a:lnSpc>
             </a:pPr>
             <a:r>
-              <a:rPr sz="2600" b="0">
+              <a:rPr sz="2600" b="0" lang="ko-KR" altLang="en-US">
                 <a:solidFill>
                   <a:srgbClr val="1E2A30"/>
                 </a:solidFill>
@@ -11908,7 +11908,7 @@
               </a:lnSpc>
             </a:pPr>
             <a:r>
-              <a:rPr sz="2600" b="0">
+              <a:rPr sz="2600" b="0" lang="ko-KR" altLang="en-US">
                 <a:solidFill>
                   <a:srgbClr val="1E2A30"/>
                 </a:solidFill>
@@ -11949,7 +11949,7 @@
               </a:lnSpc>
             </a:pPr>
             <a:r>
-              <a:rPr sz="2600" b="0">
+              <a:rPr sz="2600" b="0" lang="ko-KR" altLang="en-US">
                 <a:solidFill>
                   <a:srgbClr val="1E2A30"/>
                 </a:solidFill>
@@ -11967,7 +11967,7 @@
               </a:lnSpc>
             </a:pPr>
             <a:r>
-              <a:rPr sz="2600" b="0">
+              <a:rPr sz="2600" b="0" lang="ko-KR" altLang="en-US">
                 <a:solidFill>
                   <a:srgbClr val="1E2A30"/>
                 </a:solidFill>
@@ -12052,7 +12052,7 @@
               </a:lnSpc>
             </a:pPr>
             <a:r>
-              <a:rPr sz="2600" b="0">
+              <a:rPr sz="2600" b="0" lang="ko-KR" altLang="en-US">
                 <a:solidFill>
                   <a:srgbClr val="1E2A30"/>
                 </a:solidFill>
@@ -12093,7 +12093,7 @@
               </a:lnSpc>
             </a:pPr>
             <a:r>
-              <a:rPr sz="2600" b="0">
+              <a:rPr sz="2600" b="0" lang="ko-KR" altLang="en-US">
                 <a:solidFill>
                   <a:srgbClr val="1E2A30"/>
                 </a:solidFill>
@@ -12111,7 +12111,7 @@
               </a:lnSpc>
             </a:pPr>
             <a:r>
-              <a:rPr sz="2600" b="0">
+              <a:rPr sz="2600" b="0" lang="ko-KR" altLang="en-US">
                 <a:solidFill>
                   <a:srgbClr val="1E2A30"/>
                 </a:solidFill>
@@ -12196,7 +12196,7 @@
               </a:lnSpc>
             </a:pPr>
             <a:r>
-              <a:rPr sz="2500" b="0">
+              <a:rPr sz="2500" b="0" lang="ko-KR" altLang="en-US">
                 <a:solidFill>
                   <a:srgbClr val="003956"/>
                 </a:solidFill>
@@ -12237,7 +12237,7 @@
               </a:lnSpc>
             </a:pPr>
             <a:r>
-              <a:rPr sz="2300" b="0">
+              <a:rPr sz="2300" b="0" lang="ko-KR" altLang="en-US">
                 <a:solidFill>
                   <a:srgbClr val="1E2A30"/>
                 </a:solidFill>
@@ -12320,7 +12320,7 @@
               </a:lnSpc>
             </a:pPr>
             <a:r>
-              <a:rPr sz="2200" b="0">
+              <a:rPr sz="2200" b="0" lang="ko-KR" altLang="en-US">
                 <a:solidFill>
                   <a:srgbClr val="6B7A80"/>
                 </a:solidFill>
@@ -12455,7 +12455,7 @@
               </a:lnSpc>
             </a:pPr>
             <a:r>
-              <a:rPr sz="1250" b="0">
+              <a:rPr sz="1250" b="0" lang="ko-KR" altLang="en-US">
                 <a:solidFill>
                   <a:srgbClr val="003956"/>
                 </a:solidFill>
@@ -12473,7 +12473,7 @@
               </a:lnSpc>
             </a:pPr>
             <a:r>
-              <a:rPr sz="1250" b="0">
+              <a:rPr sz="1250" b="0" lang="ko-KR" altLang="en-US">
                 <a:solidFill>
                   <a:srgbClr val="003956"/>
                 </a:solidFill>
@@ -12514,7 +12514,7 @@
               </a:lnSpc>
             </a:pPr>
             <a:r>
-              <a:rPr sz="1600" b="0">
+              <a:rPr sz="1600" b="0" lang="ko-KR" altLang="en-US">
                 <a:solidFill>
                   <a:srgbClr val="96A8A7"/>
                 </a:solidFill>
@@ -12599,7 +12599,7 @@
               </a:lnSpc>
             </a:pPr>
             <a:r>
-              <a:rPr sz="3500" b="0">
+              <a:rPr sz="3500" b="0" lang="ko-KR" altLang="en-US">
                 <a:solidFill>
                   <a:srgbClr val="1E2A30"/>
                 </a:solidFill>
@@ -12682,7 +12682,7 @@
               </a:lnSpc>
             </a:pPr>
             <a:r>
-              <a:rPr sz="2200" b="0">
+              <a:rPr sz="2200" b="0" lang="ko-KR" altLang="en-US">
                 <a:solidFill>
                   <a:srgbClr val="6B7A80"/>
                 </a:solidFill>
@@ -12723,7 +12723,7 @@
               </a:lnSpc>
             </a:pPr>
             <a:r>
-              <a:rPr sz="2100" b="0">
+              <a:rPr sz="2100" b="0" lang="ko-KR" altLang="en-US">
                 <a:solidFill>
                   <a:srgbClr val="6B7A80"/>
                 </a:solidFill>
@@ -12808,7 +12808,7 @@
               </a:lnSpc>
             </a:pPr>
             <a:r>
-              <a:rPr sz="4500" b="0">
+              <a:rPr sz="4500" b="0" lang="ko-KR" altLang="en-US">
                 <a:solidFill>
                   <a:srgbClr val="2F5DA8"/>
                 </a:solidFill>
@@ -12849,7 +12849,7 @@
               </a:lnSpc>
             </a:pPr>
             <a:r>
-              <a:rPr sz="2800" b="0">
+              <a:rPr sz="2800" b="0" lang="ko-KR" altLang="en-US">
                 <a:solidFill>
                   <a:srgbClr val="1E2A30"/>
                 </a:solidFill>
@@ -12934,7 +12934,7 @@
               </a:lnSpc>
             </a:pPr>
             <a:r>
-              <a:rPr sz="4500" b="0">
+              <a:rPr sz="4500" b="0" lang="ko-KR" altLang="en-US">
                 <a:solidFill>
                   <a:srgbClr val="2F5DA8"/>
                 </a:solidFill>
@@ -12975,7 +12975,7 @@
               </a:lnSpc>
             </a:pPr>
             <a:r>
-              <a:rPr sz="2800" b="0">
+              <a:rPr sz="2800" b="0" lang="ko-KR" altLang="en-US">
                 <a:solidFill>
                   <a:srgbClr val="1E2A30"/>
                 </a:solidFill>
@@ -13060,7 +13060,7 @@
               </a:lnSpc>
             </a:pPr>
             <a:r>
-              <a:rPr sz="4500" b="0">
+              <a:rPr sz="4500" b="0" lang="ko-KR" altLang="en-US">
                 <a:solidFill>
                   <a:srgbClr val="2F5DA8"/>
                 </a:solidFill>
@@ -13101,7 +13101,7 @@
               </a:lnSpc>
             </a:pPr>
             <a:r>
-              <a:rPr sz="2800" b="0">
+              <a:rPr sz="2800" b="0" lang="ko-KR" altLang="en-US">
                 <a:solidFill>
                   <a:srgbClr val="1E2A30"/>
                 </a:solidFill>
@@ -13186,7 +13186,7 @@
               </a:lnSpc>
             </a:pPr>
             <a:r>
-              <a:rPr sz="4500" b="0">
+              <a:rPr sz="4500" b="0" lang="ko-KR" altLang="en-US">
                 <a:solidFill>
                   <a:srgbClr val="2F5DA8"/>
                 </a:solidFill>
@@ -13227,7 +13227,7 @@
               </a:lnSpc>
             </a:pPr>
             <a:r>
-              <a:rPr sz="2800" b="0">
+              <a:rPr sz="2800" b="0" lang="ko-KR" altLang="en-US">
                 <a:solidFill>
                   <a:srgbClr val="1E2A30"/>
                 </a:solidFill>
@@ -13362,7 +13362,7 @@
               </a:lnSpc>
             </a:pPr>
             <a:r>
-              <a:rPr sz="1250" b="0">
+              <a:rPr sz="1250" b="0" lang="ko-KR" altLang="en-US">
                 <a:solidFill>
                   <a:srgbClr val="003956"/>
                 </a:solidFill>
@@ -13380,7 +13380,7 @@
               </a:lnSpc>
             </a:pPr>
             <a:r>
-              <a:rPr sz="1250" b="0">
+              <a:rPr sz="1250" b="0" lang="ko-KR" altLang="en-US">
                 <a:solidFill>
                   <a:srgbClr val="003956"/>
                 </a:solidFill>
@@ -13421,7 +13421,7 @@
               </a:lnSpc>
             </a:pPr>
             <a:r>
-              <a:rPr sz="1600" b="0">
+              <a:rPr sz="1600" b="0" lang="ko-KR" altLang="en-US">
                 <a:solidFill>
                   <a:srgbClr val="96A8A7"/>
                 </a:solidFill>
@@ -13506,7 +13506,7 @@
               </a:lnSpc>
             </a:pPr>
             <a:r>
-              <a:rPr sz="3500" b="0">
+              <a:rPr sz="3500" b="0" lang="ko-KR" altLang="en-US">
                 <a:solidFill>
                   <a:srgbClr val="1E2A30"/>
                 </a:solidFill>
@@ -13589,7 +13589,7 @@
               </a:lnSpc>
             </a:pPr>
             <a:r>
-              <a:rPr sz="2100" b="0">
+              <a:rPr sz="2100" b="0" lang="ko-KR" altLang="en-US">
                 <a:solidFill>
                   <a:srgbClr val="6B7A80"/>
                 </a:solidFill>
@@ -13674,7 +13674,7 @@
               </a:lnSpc>
             </a:pPr>
             <a:r>
-              <a:rPr sz="2200" b="0">
+              <a:rPr sz="2200" b="0" lang="ko-KR" altLang="en-US">
                 <a:solidFill>
                   <a:srgbClr val="FFFFFF"/>
                 </a:solidFill>
@@ -13715,7 +13715,7 @@
               </a:lnSpc>
             </a:pPr>
             <a:r>
-              <a:rPr sz="2200" b="0">
+              <a:rPr sz="2200" b="0" lang="ko-KR" altLang="en-US">
                 <a:solidFill>
                   <a:srgbClr val="1E2A30"/>
                 </a:solidFill>
@@ -13726,7 +13726,7 @@
               <a:t>교재는 </a:t>
             </a:r>
             <a:r>
-              <a:rPr sz="2200" b="0">
+              <a:rPr sz="2200" b="0" lang="ko-KR" altLang="en-US">
                 <a:solidFill>
                   <a:srgbClr val="2F5DA8"/>
                 </a:solidFill>
@@ -13737,7 +13737,7 @@
               <a:t>수업 진도에 맞춘 참고용</a:t>
             </a:r>
             <a:r>
-              <a:rPr sz="2200" b="0">
+              <a:rPr sz="2200" b="0" lang="ko-KR" altLang="en-US">
                 <a:solidFill>
                   <a:srgbClr val="1E2A30"/>
                 </a:solidFill>
@@ -13822,7 +13822,7 @@
               </a:lnSpc>
             </a:pPr>
             <a:r>
-              <a:rPr sz="2200" b="0">
+              <a:rPr sz="2200" b="0" lang="ko-KR" altLang="en-US">
                 <a:solidFill>
                   <a:srgbClr val="FFFFFF"/>
                 </a:solidFill>
@@ -13863,7 +13863,7 @@
               </a:lnSpc>
             </a:pPr>
             <a:r>
-              <a:rPr sz="2100" b="0">
+              <a:rPr sz="2100" b="0" lang="ko-KR" altLang="en-US">
                 <a:solidFill>
                   <a:srgbClr val="1E2A30"/>
                 </a:solidFill>
@@ -13874,7 +13874,7 @@
               <a:t>교재의 그림·내용 일부를 </a:t>
             </a:r>
             <a:r>
-              <a:rPr sz="2100" b="0">
+              <a:rPr sz="2100" b="0" lang="ko-KR" altLang="en-US">
                 <a:solidFill>
                   <a:srgbClr val="2F5DA8"/>
                 </a:solidFill>
@@ -13885,7 +13885,7 @@
               <a:t>저작권법 제28조(공표된 저작물의 인용)</a:t>
             </a:r>
             <a:r>
-              <a:rPr sz="2100" b="0">
+              <a:rPr sz="2100" b="0" lang="ko-KR" altLang="en-US">
                 <a:solidFill>
                   <a:srgbClr val="1E2A30"/>
                 </a:solidFill>
@@ -13970,7 +13970,7 @@
               </a:lnSpc>
             </a:pPr>
             <a:r>
-              <a:rPr sz="2200" b="0">
+              <a:rPr sz="2200" b="0" lang="ko-KR" altLang="en-US">
                 <a:solidFill>
                   <a:srgbClr val="FFFFFF"/>
                 </a:solidFill>
@@ -14011,7 +14011,7 @@
               </a:lnSpc>
             </a:pPr>
             <a:r>
-              <a:rPr sz="2900" b="0">
+              <a:rPr sz="2100" b="0" lang="ko-KR" altLang="en-US">
                 <a:solidFill>
                   <a:srgbClr val="1E2A30"/>
                 </a:solidFill>
@@ -14019,10 +14019,10 @@
                 <a:ea typeface="프리젠테이션 5 Medium"/>
                 <a:cs typeface="프리젠테이션 5 Medium"/>
               </a:rPr>
-              <a:t>도표·그래프·예시 그림은 교재 것을 쓰지 않고 </a:t>
-            </a:r>
-            <a:r>
-              <a:rPr sz="2900" b="0">
+              <a:t>도표·그래프·예시 그림은 </a:t>
+            </a:r>
+            <a:r>
+              <a:rPr sz="2100" b="0" lang="ko-KR" altLang="en-US">
                 <a:solidFill>
                   <a:srgbClr val="2F5DA8"/>
                 </a:solidFill>
@@ -14030,10 +14030,10 @@
                 <a:ea typeface="프리젠테이션 5 Medium"/>
                 <a:cs typeface="프리젠테이션 5 Medium"/>
               </a:rPr>
-              <a:t>전부 직접 제작</a:t>
-            </a:r>
-            <a:r>
-              <a:rPr sz="2900" b="0">
+              <a:t>직접 제작</a:t>
+            </a:r>
+            <a:r>
+              <a:rPr sz="2100" b="0" lang="ko-KR" altLang="en-US">
                 <a:solidFill>
                   <a:srgbClr val="1E2A30"/>
                 </a:solidFill>
@@ -14041,7 +14041,7 @@
                 <a:ea typeface="프리젠테이션 5 Medium"/>
                 <a:cs typeface="프리젠테이션 5 Medium"/>
               </a:rPr>
-              <a:t>했다</a:t>
+              <a:t>하는 것을 원칙으로 하고, 교재 그림을 그대로 쓴 경우에는 캡션에 인용임을 밝혔다</a:t>
             </a:r>
           </a:p>
         </p:txBody>
@@ -14120,7 +14120,7 @@
               </a:lnSpc>
             </a:pPr>
             <a:r>
-              <a:rPr sz="2600" b="0">
+              <a:rPr sz="2600" b="0" lang="ko-KR" altLang="en-US">
                 <a:solidFill>
                   <a:srgbClr val="C1662F"/>
                 </a:solidFill>
@@ -14161,7 +14161,7 @@
               </a:lnSpc>
             </a:pPr>
             <a:r>
-              <a:rPr sz="1900" b="0">
+              <a:rPr sz="1900" b="0" lang="ko-KR" altLang="en-US">
                 <a:solidFill>
                   <a:srgbClr val="1E2A30"/>
                 </a:solidFill>
@@ -14172,7 +14172,7 @@
               <a:t>이 자료는 </a:t>
             </a:r>
             <a:r>
-              <a:rPr sz="1900" b="0">
+              <a:rPr sz="1900" b="0" lang="ko-KR" altLang="en-US">
                 <a:solidFill>
                   <a:srgbClr val="2F5DA8"/>
                 </a:solidFill>
@@ -14183,7 +14183,7 @@
               <a:t>대학원 개인 학습·연구 목적</a:t>
             </a:r>
             <a:r>
-              <a:rPr sz="1900" b="0">
+              <a:rPr sz="1900" b="0" lang="ko-KR" altLang="en-US">
                 <a:solidFill>
                   <a:srgbClr val="1E2A30"/>
                 </a:solidFill>
@@ -14201,7 +14201,7 @@
               </a:lnSpc>
             </a:pPr>
             <a:r>
-              <a:rPr sz="1900" b="0">
+              <a:rPr sz="1900" b="0" lang="ko-KR" altLang="en-US">
                 <a:solidFill>
                   <a:srgbClr val="1E2A30"/>
                 </a:solidFill>
@@ -14286,7 +14286,7 @@
               </a:lnSpc>
             </a:pPr>
             <a:r>
-              <a:rPr sz="2700" b="0">
+              <a:rPr sz="2700" b="0" lang="ko-KR" altLang="en-US">
                 <a:solidFill>
                   <a:srgbClr val="003956"/>
                 </a:solidFill>
@@ -14327,7 +14327,7 @@
               </a:lnSpc>
             </a:pPr>
             <a:r>
-              <a:rPr sz="2300" b="0">
+              <a:rPr sz="2200" b="0" lang="ko-KR" altLang="en-US">
                 <a:solidFill>
                   <a:srgbClr val="1E2A30"/>
                 </a:solidFill>
@@ -14335,7 +14335,7 @@
                 <a:ea typeface="프리젠테이션 5 Medium"/>
                 <a:cs typeface="프리젠테이션 5 Medium"/>
               </a:rPr>
-              <a:t>정성환·배종욱, 『OpenCV-Python으로 배우는 영상 처리 및 응용』, 생능출판사  ·  수업 자료(CH01~03)</a:t>
+              <a:t>정성환·배종욱, 『OpenCV-Python으로 배우는 영상 처리 및 응용』, 생능출판사  ·  수업 자료(CH01~04)</a:t>
             </a:r>
           </a:p>
         </p:txBody>
@@ -14394,7 +14394,7 @@
               </a:lnSpc>
             </a:pPr>
             <a:r>
-              <a:rPr sz="10100" b="0">
+              <a:rPr sz="10100" b="0" lang="ko-KR" altLang="en-US">
                 <a:solidFill>
                   <a:srgbClr val="2E5A75"/>
                 </a:solidFill>
@@ -14477,7 +14477,7 @@
               </a:lnSpc>
             </a:pPr>
             <a:r>
-              <a:rPr sz="5500" b="0">
+              <a:rPr sz="5500" b="0" lang="ko-KR" altLang="en-US">
                 <a:solidFill>
                   <a:srgbClr val="FFFFFF"/>
                 </a:solidFill>
@@ -14518,7 +14518,7 @@
               </a:lnSpc>
             </a:pPr>
             <a:r>
-              <a:rPr sz="2600" b="0">
+              <a:rPr sz="2600" b="0" lang="ko-KR" altLang="en-US">
                 <a:solidFill>
                   <a:srgbClr val="96A8A7"/>
                 </a:solidFill>
@@ -14559,7 +14559,7 @@
               </a:lnSpc>
             </a:pPr>
             <a:r>
-              <a:rPr sz="2600" b="0">
+              <a:rPr sz="2600" b="0" lang="ko-KR" altLang="en-US">
                 <a:solidFill>
                   <a:srgbClr val="B9C8D2"/>
                 </a:solidFill>
@@ -14600,7 +14600,7 @@
               </a:lnSpc>
             </a:pPr>
             <a:r>
-              <a:rPr sz="2600" b="0">
+              <a:rPr sz="2600" b="0" lang="ko-KR" altLang="en-US">
                 <a:solidFill>
                   <a:srgbClr val="B9C8D2"/>
                 </a:solidFill>
@@ -14641,7 +14641,7 @@
               </a:lnSpc>
             </a:pPr>
             <a:r>
-              <a:rPr sz="2600" b="0">
+              <a:rPr sz="2600" b="0" lang="ko-KR" altLang="en-US">
                 <a:solidFill>
                   <a:srgbClr val="B9C8D2"/>
                 </a:solidFill>
@@ -14776,7 +14776,7 @@
               </a:lnSpc>
             </a:pPr>
             <a:r>
-              <a:rPr sz="1250" b="0">
+              <a:rPr sz="1250" b="0" lang="ko-KR" altLang="en-US">
                 <a:solidFill>
                   <a:srgbClr val="003956"/>
                 </a:solidFill>
@@ -14794,7 +14794,7 @@
               </a:lnSpc>
             </a:pPr>
             <a:r>
-              <a:rPr sz="1250" b="0">
+              <a:rPr sz="1250" b="0" lang="ko-KR" altLang="en-US">
                 <a:solidFill>
                   <a:srgbClr val="003956"/>
                 </a:solidFill>
@@ -14835,7 +14835,7 @@
               </a:lnSpc>
             </a:pPr>
             <a:r>
-              <a:rPr sz="1600" b="0">
+              <a:rPr sz="1600" b="0" lang="ko-KR" altLang="en-US">
                 <a:solidFill>
                   <a:srgbClr val="96A8A7"/>
                 </a:solidFill>
@@ -14920,7 +14920,7 @@
               </a:lnSpc>
             </a:pPr>
             <a:r>
-              <a:rPr sz="3500" b="0">
+              <a:rPr sz="3500" b="0" lang="ko-KR" altLang="en-US">
                 <a:solidFill>
                   <a:srgbClr val="1E2A30"/>
                 </a:solidFill>
@@ -15003,7 +15003,7 @@
               </a:lnSpc>
             </a:pPr>
             <a:r>
-              <a:rPr sz="2200" b="0">
+              <a:rPr sz="2200" b="0" lang="ko-KR" altLang="en-US">
                 <a:solidFill>
                   <a:srgbClr val="6B7A80"/>
                 </a:solidFill>
@@ -15044,7 +15044,7 @@
               </a:lnSpc>
             </a:pPr>
             <a:r>
-              <a:rPr sz="2100" b="0">
+              <a:rPr sz="2100" b="0" lang="ko-KR" altLang="en-US">
                 <a:solidFill>
                   <a:srgbClr val="6B7A80"/>
                 </a:solidFill>
@@ -15129,7 +15129,7 @@
               </a:lnSpc>
             </a:pPr>
             <a:r>
-              <a:rPr sz="2200" b="0">
+              <a:rPr sz="2200" b="0" lang="ko-KR" altLang="en-US">
                 <a:solidFill>
                   <a:srgbClr val="FFFFFF"/>
                 </a:solidFill>
@@ -15170,7 +15170,7 @@
               </a:lnSpc>
             </a:pPr>
             <a:r>
-              <a:rPr sz="2900" b="0">
+              <a:rPr sz="2900" b="0" lang="ko-KR" altLang="en-US">
                 <a:solidFill>
                   <a:srgbClr val="1E2A30"/>
                 </a:solidFill>
@@ -15181,7 +15181,7 @@
               <a:t>영상처리를 </a:t>
             </a:r>
             <a:r>
-              <a:rPr sz="2900" b="0">
+              <a:rPr sz="2900" b="0" lang="ko-KR" altLang="en-US">
                 <a:solidFill>
                   <a:srgbClr val="2F5DA8"/>
                 </a:solidFill>
@@ -15192,7 +15192,7 @@
               <a:t>한 문장으로 정의</a:t>
             </a:r>
             <a:r>
-              <a:rPr sz="2900" b="0">
+              <a:rPr sz="2900" b="0" lang="ko-KR" altLang="en-US">
                 <a:solidFill>
                   <a:srgbClr val="1E2A30"/>
                 </a:solidFill>
@@ -15277,7 +15277,7 @@
               </a:lnSpc>
             </a:pPr>
             <a:r>
-              <a:rPr sz="2200" b="0">
+              <a:rPr sz="2200" b="0" lang="ko-KR" altLang="en-US">
                 <a:solidFill>
                   <a:srgbClr val="FFFFFF"/>
                 </a:solidFill>
@@ -15318,7 +15318,7 @@
               </a:lnSpc>
             </a:pPr>
             <a:r>
-              <a:rPr sz="2900" b="0">
+              <a:rPr sz="2900" b="0" lang="ko-KR" altLang="en-US">
                 <a:solidFill>
                   <a:srgbClr val="1E2A30"/>
                 </a:solidFill>
@@ -15329,7 +15329,7 @@
               <a:t>아날로그 빛이 디지털 영상이 되는 두 단계, </a:t>
             </a:r>
             <a:r>
-              <a:rPr sz="2900" b="0">
+              <a:rPr sz="2900" b="0" lang="ko-KR" altLang="en-US">
                 <a:solidFill>
                   <a:srgbClr val="2F5DA8"/>
                 </a:solidFill>
@@ -15340,7 +15340,7 @@
               <a:t>표본화와 양자화</a:t>
             </a:r>
             <a:r>
-              <a:rPr sz="2900" b="0">
+              <a:rPr sz="2900" b="0" lang="ko-KR" altLang="en-US">
                 <a:solidFill>
                   <a:srgbClr val="1E2A30"/>
                 </a:solidFill>
@@ -15425,7 +15425,7 @@
               </a:lnSpc>
             </a:pPr>
             <a:r>
-              <a:rPr sz="2200" b="0">
+              <a:rPr sz="2200" b="0" lang="ko-KR" altLang="en-US">
                 <a:solidFill>
                   <a:srgbClr val="FFFFFF"/>
                 </a:solidFill>
@@ -15466,7 +15466,7 @@
               </a:lnSpc>
             </a:pPr>
             <a:r>
-              <a:rPr sz="2900" b="0">
+              <a:rPr sz="2900" b="0" lang="ko-KR" altLang="en-US">
                 <a:solidFill>
                   <a:srgbClr val="1E2A30"/>
                 </a:solidFill>
@@ -15477,7 +15477,7 @@
               <a:t>영상처리·컴퓨터 비전·그래픽스를 </a:t>
             </a:r>
             <a:r>
-              <a:rPr sz="2900" b="0">
+              <a:rPr sz="2900" b="0" lang="ko-KR" altLang="en-US">
                 <a:solidFill>
                   <a:srgbClr val="2F5DA8"/>
                 </a:solidFill>
@@ -15488,7 +15488,7 @@
               <a:t>입출력 기준</a:t>
             </a:r>
             <a:r>
-              <a:rPr sz="2900" b="0">
+              <a:rPr sz="2900" b="0" lang="ko-KR" altLang="en-US">
                 <a:solidFill>
                   <a:srgbClr val="1E2A30"/>
                 </a:solidFill>
@@ -15573,7 +15573,7 @@
               </a:lnSpc>
             </a:pPr>
             <a:r>
-              <a:rPr sz="2700" b="0">
+              <a:rPr sz="2700" b="0" lang="ko-KR" altLang="en-US">
                 <a:solidFill>
                   <a:srgbClr val="003956"/>
                 </a:solidFill>
@@ -15614,7 +15614,7 @@
               </a:lnSpc>
             </a:pPr>
             <a:r>
-              <a:rPr sz="2900" b="0">
+              <a:rPr sz="2900" b="0" lang="ko-KR" altLang="en-US">
                 <a:solidFill>
                   <a:srgbClr val="1E2A30"/>
                 </a:solidFill>
@@ -15625,7 +15625,7 @@
               <a:t>영상은 </a:t>
             </a:r>
             <a:r>
-              <a:rPr sz="2900" b="0">
+              <a:rPr sz="2900" b="0" lang="ko-KR" altLang="en-US">
                 <a:solidFill>
                   <a:srgbClr val="2F5DA8"/>
                 </a:solidFill>
@@ -15636,7 +15636,7 @@
               <a:t>숫자 행렬</a:t>
             </a:r>
             <a:r>
-              <a:rPr sz="2900" b="0">
+              <a:rPr sz="2900" b="0" lang="ko-KR" altLang="en-US">
                 <a:solidFill>
                   <a:srgbClr val="1E2A30"/>
                 </a:solidFill>
@@ -15661,7 +15661,7 @@
               </a:lnSpc>
             </a:pPr>
             <a:r>
-              <a:rPr sz="2900" b="0">
+              <a:rPr sz="2900" b="0" lang="ko-KR" altLang="en-US">
                 <a:solidFill>
                   <a:srgbClr val="1E2A30"/>
                 </a:solidFill>
@@ -15679,7 +15679,7 @@
               </a:lnSpc>
             </a:pPr>
             <a:r>
-              <a:rPr sz="2900" b="0">
+              <a:rPr sz="2900" b="0" lang="ko-KR" altLang="en-US">
                 <a:solidFill>
                   <a:srgbClr val="1E2A30"/>
                 </a:solidFill>
@@ -15814,7 +15814,7 @@
               </a:lnSpc>
             </a:pPr>
             <a:r>
-              <a:rPr sz="1250" b="0">
+              <a:rPr sz="1250" b="0" lang="ko-KR" altLang="en-US">
                 <a:solidFill>
                   <a:srgbClr val="003956"/>
                 </a:solidFill>
@@ -15832,7 +15832,7 @@
               </a:lnSpc>
             </a:pPr>
             <a:r>
-              <a:rPr sz="1250" b="0">
+              <a:rPr sz="1250" b="0" lang="ko-KR" altLang="en-US">
                 <a:solidFill>
                   <a:srgbClr val="003956"/>
                 </a:solidFill>
@@ -15873,7 +15873,7 @@
               </a:lnSpc>
             </a:pPr>
             <a:r>
-              <a:rPr sz="1600" b="0">
+              <a:rPr sz="1600" b="0" lang="ko-KR" altLang="en-US">
                 <a:solidFill>
                   <a:srgbClr val="96A8A7"/>
                 </a:solidFill>
@@ -15958,7 +15958,7 @@
               </a:lnSpc>
             </a:pPr>
             <a:r>
-              <a:rPr sz="3500" b="0">
+              <a:rPr sz="3500" b="0" lang="ko-KR" altLang="en-US">
                 <a:solidFill>
                   <a:srgbClr val="1E2A30"/>
                 </a:solidFill>
@@ -16041,7 +16041,7 @@
               </a:lnSpc>
             </a:pPr>
             <a:r>
-              <a:rPr sz="2200" b="0">
+              <a:rPr sz="2200" b="0" lang="ko-KR" altLang="en-US">
                 <a:solidFill>
                   <a:srgbClr val="6B7A80"/>
                 </a:solidFill>
@@ -16082,7 +16082,7 @@
               </a:lnSpc>
             </a:pPr>
             <a:r>
-              <a:rPr sz="2100" b="0">
+              <a:rPr sz="2100" b="0" lang="ko-KR" altLang="en-US">
                 <a:solidFill>
                   <a:srgbClr val="6B7A80"/>
                 </a:solidFill>
@@ -16163,11 +16163,11 @@
           <a:p>
             <a:pPr algn="ctr">
               <a:lnSpc>
-                <a:spcPct val="125000"/>
-              </a:lnSpc>
-            </a:pPr>
-            <a:r>
-              <a:rPr sz="2500" b="0">
+                <a:spcPct val="115000"/>
+              </a:lnSpc>
+            </a:pPr>
+            <a:r>
+              <a:rPr sz="2500" b="0" lang="ko-KR" altLang="en-US">
                 <a:solidFill>
                   <a:srgbClr val="2F5DA8"/>
                 </a:solidFill>
@@ -16204,11 +16204,11 @@
           <a:p>
             <a:pPr algn="ctr">
               <a:lnSpc>
-                <a:spcPct val="125000"/>
-              </a:lnSpc>
-            </a:pPr>
-            <a:r>
-              <a:rPr sz="2500" b="0">
+                <a:spcPct val="115000"/>
+              </a:lnSpc>
+            </a:pPr>
+            <a:r>
+              <a:rPr sz="2500" b="0" lang="ko-KR" altLang="en-US">
                 <a:solidFill>
                   <a:srgbClr val="2F5DA8"/>
                 </a:solidFill>
@@ -16245,11 +16245,11 @@
           <a:p>
             <a:pPr algn="ctr">
               <a:lnSpc>
-                <a:spcPct val="125000"/>
-              </a:lnSpc>
-            </a:pPr>
-            <a:r>
-              <a:rPr sz="2500" b="0">
+                <a:spcPct val="115000"/>
+              </a:lnSpc>
+            </a:pPr>
+            <a:r>
+              <a:rPr sz="2500" b="0" lang="ko-KR" altLang="en-US">
                 <a:solidFill>
                   <a:srgbClr val="2F5DA8"/>
                 </a:solidFill>
@@ -16334,7 +16334,7 @@
               </a:lnSpc>
             </a:pPr>
             <a:r>
-              <a:rPr sz="2600" b="0">
+              <a:rPr sz="2600" b="0" lang="ko-KR" altLang="en-US">
                 <a:solidFill>
                   <a:srgbClr val="1E2A30"/>
                 </a:solidFill>
@@ -16375,7 +16375,7 @@
               </a:lnSpc>
             </a:pPr>
             <a:r>
-              <a:rPr sz="2600" b="0">
+              <a:rPr sz="2600" b="0" lang="ko-KR" altLang="en-US">
                 <a:solidFill>
                   <a:srgbClr val="1E2A30"/>
                 </a:solidFill>
@@ -16416,7 +16416,7 @@
               </a:lnSpc>
             </a:pPr>
             <a:r>
-              <a:rPr sz="2400" b="0">
+              <a:rPr sz="2400" b="0" lang="ko-KR" altLang="en-US">
                 <a:solidFill>
                   <a:srgbClr val="1E2A30"/>
                 </a:solidFill>
@@ -16457,7 +16457,7 @@
               </a:lnSpc>
             </a:pPr>
             <a:r>
-              <a:rPr sz="2600" b="0">
+              <a:rPr sz="2600" b="0" lang="ko-KR" altLang="en-US">
                 <a:solidFill>
                   <a:srgbClr val="1E2A30"/>
                 </a:solidFill>
@@ -16498,7 +16498,7 @@
               </a:lnSpc>
             </a:pPr>
             <a:r>
-              <a:rPr sz="2400" b="0">
+              <a:rPr sz="2400" b="0" lang="ko-KR" altLang="en-US">
                 <a:solidFill>
                   <a:srgbClr val="1E2A30"/>
                 </a:solidFill>
@@ -16539,7 +16539,7 @@
               </a:lnSpc>
             </a:pPr>
             <a:r>
-              <a:rPr sz="2600" b="0">
+              <a:rPr sz="2600" b="0" lang="ko-KR" altLang="en-US">
                 <a:solidFill>
                   <a:srgbClr val="1E2A30"/>
                 </a:solidFill>
@@ -16624,7 +16624,7 @@
               </a:lnSpc>
             </a:pPr>
             <a:r>
-              <a:rPr sz="2600" b="0">
+              <a:rPr sz="2600" b="0" lang="ko-KR" altLang="en-US">
                 <a:solidFill>
                   <a:srgbClr val="1E2A30"/>
                 </a:solidFill>
@@ -16665,7 +16665,7 @@
               </a:lnSpc>
             </a:pPr>
             <a:r>
-              <a:rPr sz="2400" b="0">
+              <a:rPr sz="2400" b="0" lang="ko-KR" altLang="en-US">
                 <a:solidFill>
                   <a:srgbClr val="1E2A30"/>
                 </a:solidFill>
@@ -16683,7 +16683,7 @@
               </a:lnSpc>
             </a:pPr>
             <a:r>
-              <a:rPr sz="2400" b="0">
+              <a:rPr sz="2400" b="0" lang="ko-KR" altLang="en-US">
                 <a:solidFill>
                   <a:srgbClr val="1E2A30"/>
                 </a:solidFill>
@@ -16724,7 +16724,7 @@
               </a:lnSpc>
             </a:pPr>
             <a:r>
-              <a:rPr sz="2600" b="0">
+              <a:rPr sz="2600" b="0" lang="ko-KR" altLang="en-US">
                 <a:solidFill>
                   <a:srgbClr val="1E2A30"/>
                 </a:solidFill>
@@ -16809,7 +16809,7 @@
               </a:lnSpc>
             </a:pPr>
             <a:r>
-              <a:rPr sz="2700" b="0">
+              <a:rPr sz="2700" b="0" lang="ko-KR" altLang="en-US">
                 <a:solidFill>
                   <a:srgbClr val="003956"/>
                 </a:solidFill>
@@ -16850,7 +16850,7 @@
               </a:lnSpc>
             </a:pPr>
             <a:r>
-              <a:rPr sz="2900" b="0">
+              <a:rPr sz="2900" b="0" lang="ko-KR" altLang="en-US">
                 <a:solidFill>
                   <a:srgbClr val="1E2A30"/>
                 </a:solidFill>
@@ -16861,7 +16861,7 @@
               <a:t>아날로그 영상처리  /  </a:t>
             </a:r>
             <a:r>
-              <a:rPr sz="2900" b="0">
+              <a:rPr sz="2900" b="0" lang="ko-KR" altLang="en-US">
                 <a:solidFill>
                   <a:srgbClr val="2F5DA8"/>
                 </a:solidFill>
@@ -16872,7 +16872,7 @@
               <a:t>디지털 영상처리</a:t>
             </a:r>
             <a:r>
-              <a:rPr sz="2900" b="0">
+              <a:rPr sz="2900" b="0" lang="ko-KR" altLang="en-US">
                 <a:solidFill>
                   <a:srgbClr val="1E2A30"/>
                 </a:solidFill>
@@ -16955,7 +16955,7 @@
               </a:lnSpc>
             </a:pPr>
             <a:r>
-              <a:rPr sz="2200" b="0">
+              <a:rPr sz="2200" b="0" lang="ko-KR" altLang="en-US">
                 <a:solidFill>
                   <a:srgbClr val="6B7A80"/>
                 </a:solidFill>
@@ -17090,7 +17090,7 @@
               </a:lnSpc>
             </a:pPr>
             <a:r>
-              <a:rPr sz="1250" b="0">
+              <a:rPr sz="1250" b="0" lang="ko-KR" altLang="en-US">
                 <a:solidFill>
                   <a:srgbClr val="003956"/>
                 </a:solidFill>
@@ -17108,7 +17108,7 @@
               </a:lnSpc>
             </a:pPr>
             <a:r>
-              <a:rPr sz="1250" b="0">
+              <a:rPr sz="1250" b="0" lang="ko-KR" altLang="en-US">
                 <a:solidFill>
                   <a:srgbClr val="003956"/>
                 </a:solidFill>
@@ -17149,7 +17149,7 @@
               </a:lnSpc>
             </a:pPr>
             <a:r>
-              <a:rPr sz="1600" b="0">
+              <a:rPr sz="1600" b="0" lang="ko-KR" altLang="en-US">
                 <a:solidFill>
                   <a:srgbClr val="96A8A7"/>
                 </a:solidFill>
@@ -17234,7 +17234,7 @@
               </a:lnSpc>
             </a:pPr>
             <a:r>
-              <a:rPr sz="3500" b="0">
+              <a:rPr sz="3500" b="0" lang="ko-KR" altLang="en-US">
                 <a:solidFill>
                   <a:srgbClr val="1E2A30"/>
                 </a:solidFill>
@@ -17317,7 +17317,7 @@
               </a:lnSpc>
             </a:pPr>
             <a:r>
-              <a:rPr sz="2200" b="0">
+              <a:rPr sz="2200" b="0" lang="ko-KR" altLang="en-US">
                 <a:solidFill>
                   <a:srgbClr val="6B7A80"/>
                 </a:solidFill>
@@ -17358,7 +17358,7 @@
               </a:lnSpc>
             </a:pPr>
             <a:r>
-              <a:rPr sz="2100" b="0">
+              <a:rPr sz="2100" b="0" lang="ko-KR" altLang="en-US">
                 <a:solidFill>
                   <a:srgbClr val="6B7A80"/>
                 </a:solidFill>
@@ -17513,7 +17513,7 @@
               </a:lnSpc>
             </a:pPr>
             <a:r>
-              <a:rPr sz="2300" b="0">
+              <a:rPr sz="2300" b="0" lang="ko-KR" altLang="en-US">
                 <a:solidFill>
                   <a:srgbClr val="6B7A80"/>
                 </a:solidFill>
@@ -17598,7 +17598,7 @@
               </a:lnSpc>
             </a:pPr>
             <a:r>
-              <a:rPr sz="2700" b="0">
+              <a:rPr sz="2700" b="0" lang="ko-KR" altLang="en-US">
                 <a:solidFill>
                   <a:srgbClr val="003956"/>
                 </a:solidFill>
@@ -17639,7 +17639,7 @@
               </a:lnSpc>
             </a:pPr>
             <a:r>
-              <a:rPr sz="2200" b="0">
+              <a:rPr sz="2100" b="0" lang="ko-KR" altLang="en-US">
                 <a:solidFill>
                   <a:srgbClr val="1E2A30"/>
                 </a:solidFill>
@@ -17657,7 +17657,7 @@
               </a:lnSpc>
             </a:pPr>
             <a:r>
-              <a:rPr sz="2200" b="0">
+              <a:rPr sz="2100" b="0" lang="ko-KR" altLang="en-US">
                 <a:solidFill>
                   <a:srgbClr val="2F5DA8"/>
                 </a:solidFill>
@@ -17675,7 +17675,7 @@
               </a:lnSpc>
             </a:pPr>
             <a:r>
-              <a:rPr sz="2200" b="0">
+              <a:rPr sz="2100" b="0" lang="ko-KR" altLang="en-US">
                 <a:solidFill>
                   <a:srgbClr val="1E2A30"/>
                 </a:solidFill>
@@ -17686,7 +17686,7 @@
               <a:t>더하는 것</a:t>
             </a:r>
             <a:r>
-              <a:rPr sz="2200" b="0">
+              <a:rPr sz="2100" b="0" lang="ko-KR" altLang="en-US">
                 <a:solidFill>
                   <a:srgbClr val="2F5DA8"/>
                 </a:solidFill>
@@ -17711,7 +17711,7 @@
               </a:lnSpc>
             </a:pPr>
             <a:r>
-              <a:rPr sz="2200" b="0">
+              <a:rPr sz="2100" b="0" lang="ko-KR" altLang="en-US">
                 <a:solidFill>
                   <a:srgbClr val="1E2A30"/>
                 </a:solidFill>
@@ -17729,7 +17729,7 @@
               </a:lnSpc>
             </a:pPr>
             <a:r>
-              <a:rPr sz="2200" b="0">
+              <a:rPr sz="2100" b="0" lang="ko-KR" altLang="en-US">
                 <a:solidFill>
                   <a:srgbClr val="1E2A30"/>
                 </a:solidFill>
@@ -17754,7 +17754,7 @@
               </a:lnSpc>
             </a:pPr>
             <a:r>
-              <a:rPr sz="2200" b="0">
+              <a:rPr sz="2100" b="0" lang="ko-KR" altLang="en-US">
                 <a:solidFill>
                   <a:srgbClr val="1E2A30"/>
                 </a:solidFill>
@@ -17772,7 +17772,7 @@
               </a:lnSpc>
             </a:pPr>
             <a:r>
-              <a:rPr sz="2200" b="0">
+              <a:rPr sz="2100" b="0" lang="ko-KR" altLang="en-US">
                 <a:solidFill>
                   <a:srgbClr val="1E2A30"/>
                 </a:solidFill>
@@ -17855,7 +17855,7 @@
               </a:lnSpc>
             </a:pPr>
             <a:r>
-              <a:rPr sz="2200" b="0">
+              <a:rPr sz="2200" b="0" lang="ko-KR" altLang="en-US">
                 <a:solidFill>
                   <a:srgbClr val="6B7A80"/>
                 </a:solidFill>
@@ -17873,7 +17873,7 @@
               </a:lnSpc>
             </a:pPr>
             <a:r>
-              <a:rPr sz="2200" b="0">
+              <a:rPr sz="2200" b="0" lang="ko-KR" altLang="en-US">
                 <a:solidFill>
                   <a:srgbClr val="6B7A80"/>
                 </a:solidFill>
@@ -18008,7 +18008,7 @@
               </a:lnSpc>
             </a:pPr>
             <a:r>
-              <a:rPr sz="1250" b="0">
+              <a:rPr sz="1250" b="0" lang="ko-KR" altLang="en-US">
                 <a:solidFill>
                   <a:srgbClr val="003956"/>
                 </a:solidFill>
@@ -18026,7 +18026,7 @@
               </a:lnSpc>
             </a:pPr>
             <a:r>
-              <a:rPr sz="1250" b="0">
+              <a:rPr sz="1250" b="0" lang="ko-KR" altLang="en-US">
                 <a:solidFill>
                   <a:srgbClr val="003956"/>
                 </a:solidFill>
@@ -18067,7 +18067,7 @@
               </a:lnSpc>
             </a:pPr>
             <a:r>
-              <a:rPr sz="1600" b="0">
+              <a:rPr sz="1600" b="0" lang="ko-KR" altLang="en-US">
                 <a:solidFill>
                   <a:srgbClr val="96A8A7"/>
                 </a:solidFill>
@@ -18152,7 +18152,7 @@
               </a:lnSpc>
             </a:pPr>
             <a:r>
-              <a:rPr sz="3500" b="0">
+              <a:rPr sz="3500" b="0" lang="ko-KR" altLang="en-US">
                 <a:solidFill>
                   <a:srgbClr val="1E2A30"/>
                 </a:solidFill>
@@ -18235,7 +18235,7 @@
               </a:lnSpc>
             </a:pPr>
             <a:r>
-              <a:rPr sz="2200" b="0">
+              <a:rPr sz="2200" b="0" lang="ko-KR" altLang="en-US">
                 <a:solidFill>
                   <a:srgbClr val="6B7A80"/>
                 </a:solidFill>
@@ -18276,7 +18276,7 @@
               </a:lnSpc>
             </a:pPr>
             <a:r>
-              <a:rPr sz="2100" b="0">
+              <a:rPr sz="2100" b="0" lang="ko-KR" altLang="en-US">
                 <a:solidFill>
                   <a:srgbClr val="6B7A80"/>
                 </a:solidFill>
@@ -18361,7 +18361,7 @@
               </a:lnSpc>
             </a:pPr>
             <a:r>
-              <a:rPr sz="2900" b="0">
+              <a:rPr sz="2900" b="0" lang="ko-KR" altLang="en-US">
                 <a:solidFill>
                   <a:srgbClr val="1E2A30"/>
                 </a:solidFill>
@@ -18488,7 +18488,7 @@
               </a:lnSpc>
             </a:pPr>
             <a:r>
-              <a:rPr sz="2900" b="0">
+              <a:rPr sz="2900" b="0" lang="ko-KR" altLang="en-US">
                 <a:solidFill>
                   <a:srgbClr val="1E2A30"/>
                 </a:solidFill>
@@ -18571,7 +18571,7 @@
               </a:lnSpc>
             </a:pPr>
             <a:r>
-              <a:rPr sz="2800" b="0">
+              <a:rPr sz="2800" b="0" lang="ko-KR" altLang="en-US">
                 <a:solidFill>
                   <a:srgbClr val="1E2A30"/>
                 </a:solidFill>
@@ -18582,7 +18582,7 @@
               <a:t>결과가 </a:t>
             </a:r>
             <a:r>
-              <a:rPr sz="2800" b="0">
+              <a:rPr sz="2800" b="0" lang="ko-KR" altLang="en-US">
                 <a:solidFill>
                   <a:srgbClr val="2F5DA8"/>
                 </a:solidFill>
@@ -18623,7 +18623,7 @@
               </a:lnSpc>
             </a:pPr>
             <a:r>
-              <a:rPr sz="2800" b="0">
+              <a:rPr sz="2800" b="0" lang="ko-KR" altLang="en-US">
                 <a:solidFill>
                   <a:srgbClr val="1E2A30"/>
                 </a:solidFill>
@@ -18634,7 +18634,7 @@
               <a:t>결과가 </a:t>
             </a:r>
             <a:r>
-              <a:rPr sz="2800" b="0">
+              <a:rPr sz="2800" b="0" lang="ko-KR" altLang="en-US">
                 <a:solidFill>
                   <a:srgbClr val="2F5DA8"/>
                 </a:solidFill>
@@ -18675,7 +18675,7 @@
               </a:lnSpc>
             </a:pPr>
             <a:r>
-              <a:rPr sz="2800" b="0">
+              <a:rPr sz="2800" b="0" lang="ko-KR" altLang="en-US">
                 <a:solidFill>
                   <a:srgbClr val="1E2A30"/>
                 </a:solidFill>
@@ -18716,7 +18716,7 @@
               </a:lnSpc>
             </a:pPr>
             <a:r>
-              <a:rPr sz="2800" b="0">
+              <a:rPr sz="2800" b="0" lang="ko-KR" altLang="en-US">
                 <a:solidFill>
                   <a:srgbClr val="1E2A30"/>
                 </a:solidFill>
@@ -18757,7 +18757,7 @@
               </a:lnSpc>
             </a:pPr>
             <a:r>
-              <a:rPr sz="2800" b="0">
+              <a:rPr sz="2800" b="0" lang="ko-KR" altLang="en-US">
                 <a:solidFill>
                   <a:srgbClr val="1E2A30"/>
                 </a:solidFill>
@@ -18798,7 +18798,7 @@
               </a:lnSpc>
             </a:pPr>
             <a:r>
-              <a:rPr sz="2800" b="0">
+              <a:rPr sz="2800" b="0" lang="ko-KR" altLang="en-US">
                 <a:solidFill>
                   <a:srgbClr val="1E2A30"/>
                 </a:solidFill>
@@ -18883,7 +18883,7 @@
               </a:lnSpc>
             </a:pPr>
             <a:r>
-              <a:rPr sz="2700" b="0">
+              <a:rPr sz="2700" b="0" lang="ko-KR" altLang="en-US">
                 <a:solidFill>
                   <a:srgbClr val="003956"/>
                 </a:solidFill>
@@ -18924,7 +18924,7 @@
               </a:lnSpc>
             </a:pPr>
             <a:r>
-              <a:rPr sz="2800" b="0">
+              <a:rPr sz="2800" b="0" lang="ko-KR" altLang="en-US">
                 <a:solidFill>
                   <a:srgbClr val="2F5DA8"/>
                 </a:solidFill>
@@ -18935,7 +18935,7 @@
               <a:t>결과물이 무엇인가</a:t>
             </a:r>
             <a:r>
-              <a:rPr sz="2800" b="0">
+              <a:rPr sz="2800" b="0" lang="ko-KR" altLang="en-US">
                 <a:solidFill>
                   <a:srgbClr val="1E2A30"/>
                 </a:solidFill>
@@ -18953,7 +18953,7 @@
               </a:lnSpc>
             </a:pPr>
             <a:r>
-              <a:rPr sz="2800" b="0">
+              <a:rPr sz="2800" b="0" lang="ko-KR" altLang="en-US">
                 <a:solidFill>
                   <a:srgbClr val="1E2A30"/>
                 </a:solidFill>
@@ -19036,7 +19036,7 @@
               </a:lnSpc>
             </a:pPr>
             <a:r>
-              <a:rPr sz="2200" b="0">
+              <a:rPr sz="2200" b="0" lang="ko-KR" altLang="en-US">
                 <a:solidFill>
                   <a:srgbClr val="6B7A80"/>
                 </a:solidFill>
@@ -19171,7 +19171,7 @@
               </a:lnSpc>
             </a:pPr>
             <a:r>
-              <a:rPr sz="1250" b="0">
+              <a:rPr sz="1250" b="0" lang="ko-KR" altLang="en-US">
                 <a:solidFill>
                   <a:srgbClr val="003956"/>
                 </a:solidFill>
@@ -19189,7 +19189,7 @@
               </a:lnSpc>
             </a:pPr>
             <a:r>
-              <a:rPr sz="1250" b="0">
+              <a:rPr sz="1250" b="0" lang="ko-KR" altLang="en-US">
                 <a:solidFill>
                   <a:srgbClr val="003956"/>
                 </a:solidFill>
@@ -19230,7 +19230,7 @@
               </a:lnSpc>
             </a:pPr>
             <a:r>
-              <a:rPr sz="1600" b="0">
+              <a:rPr sz="1600" b="0" lang="ko-KR" altLang="en-US">
                 <a:solidFill>
                   <a:srgbClr val="96A8A7"/>
                 </a:solidFill>
@@ -19315,7 +19315,7 @@
               </a:lnSpc>
             </a:pPr>
             <a:r>
-              <a:rPr sz="3500" b="0">
+              <a:rPr sz="3500" b="0" lang="ko-KR" altLang="en-US">
                 <a:solidFill>
                   <a:srgbClr val="1E2A30"/>
                 </a:solidFill>
@@ -19398,7 +19398,7 @@
               </a:lnSpc>
             </a:pPr>
             <a:r>
-              <a:rPr sz="2200" b="0">
+              <a:rPr sz="2200" b="0" lang="ko-KR" altLang="en-US">
                 <a:solidFill>
                   <a:srgbClr val="6B7A80"/>
                 </a:solidFill>
@@ -19439,7 +19439,7 @@
               </a:lnSpc>
             </a:pPr>
             <a:r>
-              <a:rPr sz="2100" b="0">
+              <a:rPr sz="2100" b="0" lang="ko-KR" altLang="en-US">
                 <a:solidFill>
                   <a:srgbClr val="6B7A80"/>
                 </a:solidFill>
@@ -19520,11 +19520,11 @@
           <a:p>
             <a:pPr algn="ctr">
               <a:lnSpc>
-                <a:spcPct val="125000"/>
-              </a:lnSpc>
-            </a:pPr>
-            <a:r>
-              <a:rPr sz="2500" b="0">
+                <a:spcPct val="115000"/>
+              </a:lnSpc>
+            </a:pPr>
+            <a:r>
+              <a:rPr sz="2500" b="0" lang="ko-KR" altLang="en-US">
                 <a:solidFill>
                   <a:srgbClr val="2F5DA8"/>
                 </a:solidFill>
@@ -19561,11 +19561,11 @@
           <a:p>
             <a:pPr algn="ctr">
               <a:lnSpc>
-                <a:spcPct val="125000"/>
-              </a:lnSpc>
-            </a:pPr>
-            <a:r>
-              <a:rPr sz="2500" b="0">
+                <a:spcPct val="115000"/>
+              </a:lnSpc>
+            </a:pPr>
+            <a:r>
+              <a:rPr sz="2500" b="0" lang="ko-KR" altLang="en-US">
                 <a:solidFill>
                   <a:srgbClr val="2F5DA8"/>
                 </a:solidFill>
@@ -19650,7 +19650,7 @@
               </a:lnSpc>
             </a:pPr>
             <a:r>
-              <a:rPr sz="2500" b="0">
+              <a:rPr sz="2500" b="0" lang="ko-KR" altLang="en-US">
                 <a:solidFill>
                   <a:srgbClr val="1E2A30"/>
                 </a:solidFill>
@@ -19691,7 +19691,7 @@
               </a:lnSpc>
             </a:pPr>
             <a:r>
-              <a:rPr sz="2500" b="0">
+              <a:rPr sz="2500" b="0" lang="ko-KR" altLang="en-US">
                 <a:solidFill>
                   <a:srgbClr val="1E2A30"/>
                 </a:solidFill>
@@ -19732,7 +19732,7 @@
               </a:lnSpc>
             </a:pPr>
             <a:r>
-              <a:rPr sz="2500" b="0">
+              <a:rPr sz="2500" b="0" lang="ko-KR" altLang="en-US">
                 <a:solidFill>
                   <a:srgbClr val="1E2A30"/>
                 </a:solidFill>
@@ -19773,7 +19773,7 @@
               </a:lnSpc>
             </a:pPr>
             <a:r>
-              <a:rPr sz="2500" b="0">
+              <a:rPr sz="2500" b="0" lang="ko-KR" altLang="en-US">
                 <a:solidFill>
                   <a:srgbClr val="1E2A30"/>
                 </a:solidFill>
@@ -19858,7 +19858,7 @@
               </a:lnSpc>
             </a:pPr>
             <a:r>
-              <a:rPr sz="2500" b="0">
+              <a:rPr sz="2500" b="0" lang="ko-KR" altLang="en-US">
                 <a:solidFill>
                   <a:srgbClr val="1E2A30"/>
                 </a:solidFill>
@@ -19899,7 +19899,7 @@
               </a:lnSpc>
             </a:pPr>
             <a:r>
-              <a:rPr sz="2500" b="0">
+              <a:rPr sz="2500" b="0" lang="ko-KR" altLang="en-US">
                 <a:solidFill>
                   <a:srgbClr val="1E2A30"/>
                 </a:solidFill>
@@ -19940,7 +19940,7 @@
               </a:lnSpc>
             </a:pPr>
             <a:r>
-              <a:rPr sz="2500" b="0">
+              <a:rPr sz="2500" b="0" lang="ko-KR" altLang="en-US">
                 <a:solidFill>
                   <a:srgbClr val="1E2A30"/>
                 </a:solidFill>
@@ -19981,7 +19981,7 @@
               </a:lnSpc>
             </a:pPr>
             <a:r>
-              <a:rPr sz="2500" b="0">
+              <a:rPr sz="2500" b="0" lang="ko-KR" altLang="en-US">
                 <a:solidFill>
                   <a:srgbClr val="1E2A30"/>
                 </a:solidFill>
@@ -20066,7 +20066,7 @@
               </a:lnSpc>
             </a:pPr>
             <a:r>
-              <a:rPr sz="2500" b="0">
+              <a:rPr sz="2500" b="0" lang="ko-KR" altLang="en-US">
                 <a:solidFill>
                   <a:srgbClr val="1E2A30"/>
                 </a:solidFill>
@@ -20107,7 +20107,7 @@
               </a:lnSpc>
             </a:pPr>
             <a:r>
-              <a:rPr sz="2500" b="0">
+              <a:rPr sz="2500" b="0" lang="ko-KR" altLang="en-US">
                 <a:solidFill>
                   <a:srgbClr val="1E2A30"/>
                 </a:solidFill>
@@ -20148,7 +20148,7 @@
               </a:lnSpc>
             </a:pPr>
             <a:r>
-              <a:rPr sz="2500" b="0">
+              <a:rPr sz="2500" b="0" lang="ko-KR" altLang="en-US">
                 <a:solidFill>
                   <a:srgbClr val="1E2A30"/>
                 </a:solidFill>
@@ -20189,7 +20189,7 @@
               </a:lnSpc>
             </a:pPr>
             <a:r>
-              <a:rPr sz="2500" b="0">
+              <a:rPr sz="2500" b="0" lang="ko-KR" altLang="en-US">
                 <a:solidFill>
                   <a:srgbClr val="1E2A30"/>
                 </a:solidFill>
@@ -20272,7 +20272,7 @@
               </a:lnSpc>
             </a:pPr>
             <a:r>
-              <a:rPr sz="2200" b="0">
+              <a:rPr sz="2200" b="0" lang="ko-KR" altLang="en-US">
                 <a:solidFill>
                   <a:srgbClr val="6B7A80"/>
                 </a:solidFill>
@@ -20290,7 +20290,7 @@
               </a:lnSpc>
             </a:pPr>
             <a:r>
-              <a:rPr sz="2200" b="0">
+              <a:rPr sz="2200" b="0" lang="ko-KR" altLang="en-US">
                 <a:solidFill>
                   <a:srgbClr val="6B7A80"/>
                 </a:solidFill>
@@ -20425,7 +20425,7 @@
               </a:lnSpc>
             </a:pPr>
             <a:r>
-              <a:rPr sz="1250" b="0">
+              <a:rPr sz="1250" b="0" lang="ko-KR" altLang="en-US">
                 <a:solidFill>
                   <a:srgbClr val="003956"/>
                 </a:solidFill>
@@ -20443,7 +20443,7 @@
               </a:lnSpc>
             </a:pPr>
             <a:r>
-              <a:rPr sz="1250" b="0">
+              <a:rPr sz="1250" b="0" lang="ko-KR" altLang="en-US">
                 <a:solidFill>
                   <a:srgbClr val="003956"/>
                 </a:solidFill>
@@ -20484,7 +20484,7 @@
               </a:lnSpc>
             </a:pPr>
             <a:r>
-              <a:rPr sz="1600" b="0">
+              <a:rPr sz="1600" b="0" lang="ko-KR" altLang="en-US">
                 <a:solidFill>
                   <a:srgbClr val="96A8A7"/>
                 </a:solidFill>
@@ -20569,7 +20569,7 @@
               </a:lnSpc>
             </a:pPr>
             <a:r>
-              <a:rPr sz="3500" b="0">
+              <a:rPr sz="3500" b="0" lang="ko-KR" altLang="en-US">
                 <a:solidFill>
                   <a:srgbClr val="1E2A30"/>
                 </a:solidFill>
@@ -20652,7 +20652,7 @@
               </a:lnSpc>
             </a:pPr>
             <a:r>
-              <a:rPr sz="2200" b="0">
+              <a:rPr sz="2200" b="0" lang="ko-KR" altLang="en-US">
                 <a:solidFill>
                   <a:srgbClr val="6B7A80"/>
                 </a:solidFill>
@@ -20693,7 +20693,7 @@
               </a:lnSpc>
             </a:pPr>
             <a:r>
-              <a:rPr sz="2100" b="0">
+              <a:rPr sz="2100" b="0" lang="ko-KR" altLang="en-US">
                 <a:solidFill>
                   <a:srgbClr val="6B7A80"/>
                 </a:solidFill>
@@ -20774,11 +20774,11 @@
           <a:p>
             <a:pPr algn="ctr">
               <a:lnSpc>
-                <a:spcPct val="125000"/>
-              </a:lnSpc>
-            </a:pPr>
-            <a:r>
-              <a:rPr sz="2500" b="0">
+                <a:spcPct val="115000"/>
+              </a:lnSpc>
+            </a:pPr>
+            <a:r>
+              <a:rPr sz="2500" b="0" lang="ko-KR" altLang="en-US">
                 <a:solidFill>
                   <a:srgbClr val="2F5DA8"/>
                 </a:solidFill>
@@ -20815,11 +20815,11 @@
           <a:p>
             <a:pPr algn="ctr">
               <a:lnSpc>
-                <a:spcPct val="125000"/>
-              </a:lnSpc>
-            </a:pPr>
-            <a:r>
-              <a:rPr sz="2500" b="0">
+                <a:spcPct val="115000"/>
+              </a:lnSpc>
+            </a:pPr>
+            <a:r>
+              <a:rPr sz="2500" b="0" lang="ko-KR" altLang="en-US">
                 <a:solidFill>
                   <a:srgbClr val="2F5DA8"/>
                 </a:solidFill>
@@ -20856,11 +20856,11 @@
           <a:p>
             <a:pPr algn="ctr">
               <a:lnSpc>
-                <a:spcPct val="125000"/>
-              </a:lnSpc>
-            </a:pPr>
-            <a:r>
-              <a:rPr sz="2500" b="0">
+                <a:spcPct val="115000"/>
+              </a:lnSpc>
+            </a:pPr>
+            <a:r>
+              <a:rPr sz="2500" b="0" lang="ko-KR" altLang="en-US">
                 <a:solidFill>
                   <a:srgbClr val="2F5DA8"/>
                 </a:solidFill>
@@ -20897,11 +20897,11 @@
           <a:p>
             <a:pPr algn="ctr">
               <a:lnSpc>
-                <a:spcPct val="125000"/>
-              </a:lnSpc>
-            </a:pPr>
-            <a:r>
-              <a:rPr sz="2500" b="0">
+                <a:spcPct val="115000"/>
+              </a:lnSpc>
+            </a:pPr>
+            <a:r>
+              <a:rPr sz="2500" b="0" lang="ko-KR" altLang="en-US">
                 <a:solidFill>
                   <a:srgbClr val="2F5DA8"/>
                 </a:solidFill>
@@ -20986,7 +20986,7 @@
               </a:lnSpc>
             </a:pPr>
             <a:r>
-              <a:rPr sz="2600" b="0">
+              <a:rPr sz="2600" b="0" lang="ko-KR" altLang="en-US">
                 <a:solidFill>
                   <a:srgbClr val="1E2A30"/>
                 </a:solidFill>
@@ -21027,7 +21027,7 @@
               </a:lnSpc>
             </a:pPr>
             <a:r>
-              <a:rPr sz="2600" b="0">
+              <a:rPr sz="2600" b="0" lang="ko-KR" altLang="en-US">
                 <a:solidFill>
                   <a:srgbClr val="1E2A30"/>
                 </a:solidFill>
@@ -21068,7 +21068,7 @@
               </a:lnSpc>
             </a:pPr>
             <a:r>
-              <a:rPr sz="2600" b="0">
+              <a:rPr sz="2600" b="0" lang="ko-KR" altLang="en-US">
                 <a:solidFill>
                   <a:srgbClr val="1E2A30"/>
                 </a:solidFill>
@@ -21109,7 +21109,7 @@
               </a:lnSpc>
             </a:pPr>
             <a:r>
-              <a:rPr sz="2600" b="0">
+              <a:rPr sz="2600" b="0" lang="ko-KR" altLang="en-US">
                 <a:solidFill>
                   <a:srgbClr val="1E2A30"/>
                 </a:solidFill>
@@ -21150,7 +21150,7 @@
               </a:lnSpc>
             </a:pPr>
             <a:r>
-              <a:rPr sz="2600" b="0">
+              <a:rPr sz="2600" b="0" lang="ko-KR" altLang="en-US">
                 <a:solidFill>
                   <a:srgbClr val="1E2A30"/>
                 </a:solidFill>
@@ -21191,7 +21191,7 @@
               </a:lnSpc>
             </a:pPr>
             <a:r>
-              <a:rPr sz="2600" b="0">
+              <a:rPr sz="2600" b="0" lang="ko-KR" altLang="en-US">
                 <a:solidFill>
                   <a:srgbClr val="1E2A30"/>
                 </a:solidFill>
@@ -21232,7 +21232,7 @@
               </a:lnSpc>
             </a:pPr>
             <a:r>
-              <a:rPr sz="2600" b="0">
+              <a:rPr sz="2600" b="0" lang="ko-KR" altLang="en-US">
                 <a:solidFill>
                   <a:srgbClr val="1E2A30"/>
                 </a:solidFill>
@@ -21273,7 +21273,7 @@
               </a:lnSpc>
             </a:pPr>
             <a:r>
-              <a:rPr sz="2600" b="0">
+              <a:rPr sz="2600" b="0" lang="ko-KR" altLang="en-US">
                 <a:solidFill>
                   <a:srgbClr val="1E2A30"/>
                 </a:solidFill>
@@ -21358,7 +21358,7 @@
               </a:lnSpc>
             </a:pPr>
             <a:r>
-              <a:rPr sz="2600" b="0">
+              <a:rPr sz="2600" b="0" lang="ko-KR" altLang="en-US">
                 <a:solidFill>
                   <a:srgbClr val="1E2A30"/>
                 </a:solidFill>
@@ -21399,7 +21399,7 @@
               </a:lnSpc>
             </a:pPr>
             <a:r>
-              <a:rPr sz="2600" b="0">
+              <a:rPr sz="2600" b="0" lang="ko-KR" altLang="en-US">
                 <a:solidFill>
                   <a:srgbClr val="1E2A30"/>
                 </a:solidFill>
@@ -21440,7 +21440,7 @@
               </a:lnSpc>
             </a:pPr>
             <a:r>
-              <a:rPr sz="2600" b="0">
+              <a:rPr sz="2600" b="0" lang="ko-KR" altLang="en-US">
                 <a:solidFill>
                   <a:srgbClr val="1E2A30"/>
                 </a:solidFill>
@@ -21481,7 +21481,7 @@
               </a:lnSpc>
             </a:pPr>
             <a:r>
-              <a:rPr sz="2600" b="0">
+              <a:rPr sz="2600" b="0" lang="ko-KR" altLang="en-US">
                 <a:solidFill>
                   <a:srgbClr val="1E2A30"/>
                 </a:solidFill>
@@ -21566,7 +21566,7 @@
               </a:lnSpc>
             </a:pPr>
             <a:r>
-              <a:rPr sz="2700" b="0">
+              <a:rPr sz="2700" b="0" lang="ko-KR" altLang="en-US">
                 <a:solidFill>
                   <a:srgbClr val="003956"/>
                 </a:solidFill>
@@ -21607,7 +21607,7 @@
               </a:lnSpc>
             </a:pPr>
             <a:r>
-              <a:rPr sz="2400" b="0">
+              <a:rPr sz="2400" b="0" lang="ko-KR" altLang="en-US">
                 <a:solidFill>
                   <a:srgbClr val="1E2A30"/>
                 </a:solidFill>
@@ -21618,7 +21618,7 @@
               <a:t>영상처리는 </a:t>
             </a:r>
             <a:r>
-              <a:rPr sz="2400" b="0">
+              <a:rPr sz="2400" b="0" lang="ko-KR" altLang="en-US">
                 <a:solidFill>
                   <a:srgbClr val="2F5DA8"/>
                 </a:solidFill>
@@ -21629,7 +21629,7 @@
               <a:t>사진 보정사</a:t>
             </a:r>
             <a:r>
-              <a:rPr sz="2400" b="0">
+              <a:rPr sz="2400" b="0" lang="ko-KR" altLang="en-US">
                 <a:solidFill>
                   <a:srgbClr val="1E2A30"/>
                 </a:solidFill>
@@ -21640,7 +21640,7 @@
               <a:t>, 컴퓨터 비전은 </a:t>
             </a:r>
             <a:r>
-              <a:rPr sz="2400" b="0">
+              <a:rPr sz="2400" b="0" lang="ko-KR" altLang="en-US">
                 <a:solidFill>
                   <a:srgbClr val="2F5DA8"/>
                 </a:solidFill>
@@ -21651,7 +21651,7 @@
               <a:t>사진을 읽는 탐정</a:t>
             </a:r>
             <a:r>
-              <a:rPr sz="2400" b="0">
+              <a:rPr sz="2400" b="0" lang="ko-KR" altLang="en-US">
                 <a:solidFill>
                   <a:srgbClr val="1E2A30"/>
                 </a:solidFill>
@@ -21662,7 +21662,7 @@
               <a:t>, 그래픽스는 </a:t>
             </a:r>
             <a:r>
-              <a:rPr sz="2400" b="0">
+              <a:rPr sz="2400" b="0" lang="ko-KR" altLang="en-US">
                 <a:solidFill>
                   <a:srgbClr val="2F5DA8"/>
                 </a:solidFill>
@@ -21673,7 +21673,7 @@
               <a:t>설계도만 보고 그리는 화가</a:t>
             </a:r>
             <a:r>
-              <a:rPr sz="2400" b="0">
+              <a:rPr sz="2400" b="0" lang="ko-KR" altLang="en-US">
                 <a:solidFill>
                   <a:srgbClr val="1E2A30"/>
                 </a:solidFill>
@@ -21691,7 +21691,7 @@
               </a:lnSpc>
             </a:pPr>
             <a:r>
-              <a:rPr sz="2400" b="0">
+              <a:rPr sz="2400" b="0" lang="ko-KR" altLang="en-US">
                 <a:solidFill>
                   <a:srgbClr val="1E2A30"/>
                 </a:solidFill>
@@ -21774,7 +21774,7 @@
               </a:lnSpc>
             </a:pPr>
             <a:r>
-              <a:rPr sz="2200" b="0">
+              <a:rPr sz="2200" b="0" lang="ko-KR" altLang="en-US">
                 <a:solidFill>
                   <a:srgbClr val="6B7A80"/>
                 </a:solidFill>
